--- a/AI Sales Coach - Pitch Deck.pptx
+++ b/AI Sales Coach - Pitch Deck.pptx
@@ -5,10 +5,10 @@
     <p:sldMasterId id="2147483666" r:id="rId4"/>
   </p:sldMasterIdLst>
   <p:notesMasterIdLst>
-    <p:notesMasterId r:id="rId15"/>
+    <p:notesMasterId r:id="rId17"/>
   </p:notesMasterIdLst>
   <p:handoutMasterIdLst>
-    <p:handoutMasterId r:id="rId16"/>
+    <p:handoutMasterId r:id="rId18"/>
   </p:handoutMasterIdLst>
   <p:sldIdLst>
     <p:sldId id="256" r:id="rId5"/>
@@ -16,11 +16,13 @@
     <p:sldId id="290" r:id="rId7"/>
     <p:sldId id="291" r:id="rId8"/>
     <p:sldId id="277" r:id="rId9"/>
-    <p:sldId id="289" r:id="rId10"/>
-    <p:sldId id="268" r:id="rId11"/>
-    <p:sldId id="264" r:id="rId12"/>
-    <p:sldId id="278" r:id="rId13"/>
-    <p:sldId id="276" r:id="rId14"/>
+    <p:sldId id="293" r:id="rId10"/>
+    <p:sldId id="292" r:id="rId11"/>
+    <p:sldId id="289" r:id="rId12"/>
+    <p:sldId id="268" r:id="rId13"/>
+    <p:sldId id="264" r:id="rId14"/>
+    <p:sldId id="278" r:id="rId15"/>
+    <p:sldId id="276" r:id="rId16"/>
   </p:sldIdLst>
   <p:sldSz cx="12192000" cy="6858000"/>
   <p:notesSz cx="6858000" cy="9144000"/>
@@ -17385,21 +17387,21 @@
           <p:cNvPr id="2" name="Title 1">
             <a:extLst>
               <a:ext uri="{FF2B5EF4-FFF2-40B4-BE49-F238E27FC236}">
-                <a16:creationId xmlns:a16="http://schemas.microsoft.com/office/drawing/2014/main" id="{BCCAEE93-8585-46D4-A7EC-F184E317CB2E}"/>
-              </a:ext>
-            </a:extLst>
-          </p:cNvPr>
-          <p:cNvSpPr>
-            <a:spLocks noGrp="1"/>
-          </p:cNvSpPr>
-          <p:nvPr>
-            <p:ph type="ctrTitle"/>
-          </p:nvPr>
-        </p:nvSpPr>
-        <p:spPr>
-          <a:xfrm>
-            <a:off x="4267200" y="1615736"/>
-            <a:ext cx="4179570" cy="1524735"/>
+                <a16:creationId xmlns:a16="http://schemas.microsoft.com/office/drawing/2014/main" id="{537E1C88-627C-4655-A4FB-0BB02EDB078A}"/>
+              </a:ext>
+            </a:extLst>
+          </p:cNvPr>
+          <p:cNvSpPr>
+            <a:spLocks noGrp="1"/>
+          </p:cNvSpPr>
+          <p:nvPr>
+            <p:ph type="title"/>
+          </p:nvPr>
+        </p:nvSpPr>
+        <p:spPr>
+          <a:xfrm>
+            <a:off x="1362075" y="1671639"/>
+            <a:ext cx="5111750" cy="1204912"/>
           </a:xfrm>
         </p:spPr>
         <p:txBody>
@@ -17408,41 +17410,381 @@
           <a:p>
             <a:r>
               <a:rPr lang="en-US" dirty="0"/>
-              <a:t>THANK YOU</a:t>
-            </a:r>
-          </a:p>
-          <a:p>
-            <a:r>
-              <a:rPr lang="en-US" sz="2800" i="1" dirty="0">
+              <a:t>WHERE WE GO NEXT</a:t>
+            </a:r>
+          </a:p>
+        </p:txBody>
+      </p:sp>
+      <p:sp>
+        <p:nvSpPr>
+          <p:cNvPr id="3" name="Content Placeholder 2">
+            <a:extLst>
+              <a:ext uri="{FF2B5EF4-FFF2-40B4-BE49-F238E27FC236}">
+                <a16:creationId xmlns:a16="http://schemas.microsoft.com/office/drawing/2014/main" id="{033634FE-ADF0-4BC3-A0A9-447EA9DD096B}"/>
+              </a:ext>
+            </a:extLst>
+          </p:cNvPr>
+          <p:cNvSpPr>
+            <a:spLocks noGrp="1"/>
+          </p:cNvSpPr>
+          <p:nvPr>
+            <p:ph type="body" idx="1"/>
+          </p:nvPr>
+        </p:nvSpPr>
+        <p:spPr>
+          <a:xfrm>
+            <a:off x="1362075" y="3100000"/>
+            <a:ext cx="5111750" cy="3100000"/>
+          </a:xfrm>
+        </p:spPr>
+        <p:txBody>
+          <a:bodyPr vert="horz" lIns="91440" tIns="45720" rIns="91440" bIns="45720" rtlCol="0" anchor="t">
+            <a:normAutofit/>
+          </a:bodyPr>
+          <a:lstStyle/>
+          <a:p>
+            <a:r>
+              <a:rPr lang="en-US" b="1" dirty="0">
                 <a:solidFill>
                   <a:srgbClr val="B85042"/>
                 </a:solidFill>
               </a:rPr>
-              <a:t>&amp; questions</a:t>
-            </a:r>
-          </a:p>
-        </p:txBody>
-      </p:sp>
-      <p:sp>
-        <p:nvSpPr>
-          <p:cNvPr id="3" name="Content Placeholder 2">
-            <a:extLst>
-              <a:ext uri="{FF2B5EF4-FFF2-40B4-BE49-F238E27FC236}">
-                <a16:creationId xmlns:a16="http://schemas.microsoft.com/office/drawing/2014/main" id="{24AFFC60-19C3-4901-93F7-7AAF4C09F8C6}"/>
-              </a:ext>
-            </a:extLst>
-          </p:cNvPr>
-          <p:cNvSpPr>
-            <a:spLocks noGrp="1"/>
-          </p:cNvSpPr>
-          <p:nvPr>
-            <p:ph type="subTitle" idx="1"/>
-          </p:nvPr>
-        </p:nvSpPr>
-        <p:spPr>
-          <a:xfrm>
-            <a:off x="4267200" y="3238103"/>
-            <a:ext cx="4179570" cy="2004161"/>
+              <a:t>SCHUFA integration</a:t>
+            </a:r>
+          </a:p>
+          <a:p>
+            <a:r>
+              <a:rPr lang="en-US" sz="1600" dirty="0"/>
+              <a:t>Pull credit score to sharpen financing tiers and risk-adjusted pricing.</a:t>
+            </a:r>
+          </a:p>
+          <a:p>
+            <a:r>
+              <a:rPr lang="en-US" b="1" dirty="0">
+                <a:solidFill>
+                  <a:srgbClr val="B85042"/>
+                </a:solidFill>
+              </a:rPr>
+              <a:t>Deeper OSINT</a:t>
+            </a:r>
+          </a:p>
+          <a:p>
+            <a:r>
+              <a:rPr lang="en-US" sz="1600" dirty="0"/>
+              <a:t>Estimate income and obligations to tailor loan sizes and monthly rates.</a:t>
+            </a:r>
+          </a:p>
+          <a:p>
+            <a:r>
+              <a:rPr lang="en-US" b="1" dirty="0">
+                <a:solidFill>
+                  <a:srgbClr val="B85042"/>
+                </a:solidFill>
+              </a:rPr>
+              <a:t>Live adaptive offers</a:t>
+            </a:r>
+          </a:p>
+          <a:p>
+            <a:r>
+              <a:rPr lang="en-US" sz="1600" dirty="0"/>
+              <a:t>Rewrite offers on-the-fly as new info surfaces during the sales call.</a:t>
+            </a:r>
+          </a:p>
+        </p:txBody>
+      </p:sp>
+      <p:sp>
+        <p:nvSpPr>
+          <p:cNvPr id="4" name="Date Placeholder 3">
+            <a:extLst>
+              <a:ext uri="{FF2B5EF4-FFF2-40B4-BE49-F238E27FC236}">
+                <a16:creationId xmlns:a16="http://schemas.microsoft.com/office/drawing/2014/main" id="{5C2ACA2A-6BBE-47CF-B76F-F56C9DBF77E6}"/>
+              </a:ext>
+            </a:extLst>
+          </p:cNvPr>
+          <p:cNvSpPr>
+            <a:spLocks noGrp="1"/>
+          </p:cNvSpPr>
+          <p:nvPr>
+            <p:ph type="dt" sz="half" idx="10"/>
+          </p:nvPr>
+        </p:nvSpPr>
+        <p:spPr>
+          <a:xfrm>
+            <a:off x="838200" y="6356350"/>
+            <a:ext cx="2743200" cy="365125"/>
+          </a:xfrm>
+        </p:spPr>
+        <p:txBody>
+          <a:bodyPr/>
+          <a:lstStyle/>
+          <a:p>
+            <a:r>
+              <a:rPr lang="en-US" dirty="0"/>
+              <a:t>2026</a:t>
+            </a:r>
+          </a:p>
+        </p:txBody>
+      </p:sp>
+      <p:sp>
+        <p:nvSpPr>
+          <p:cNvPr id="5" name="Footer Placeholder 4">
+            <a:extLst>
+              <a:ext uri="{FF2B5EF4-FFF2-40B4-BE49-F238E27FC236}">
+                <a16:creationId xmlns:a16="http://schemas.microsoft.com/office/drawing/2014/main" id="{396A095E-DB05-47EC-A2D5-47398A4A00B4}"/>
+              </a:ext>
+            </a:extLst>
+          </p:cNvPr>
+          <p:cNvSpPr>
+            <a:spLocks noGrp="1"/>
+          </p:cNvSpPr>
+          <p:nvPr>
+            <p:ph type="ftr" sz="quarter" idx="11"/>
+          </p:nvPr>
+        </p:nvSpPr>
+        <p:spPr>
+          <a:xfrm>
+            <a:off x="5224463" y="6356350"/>
+            <a:ext cx="1743075" cy="365125"/>
+          </a:xfrm>
+        </p:spPr>
+        <p:txBody>
+          <a:bodyPr/>
+          <a:lstStyle/>
+          <a:p>
+            <a:r>
+              <a:rPr lang="en-US" dirty="0"/>
+              <a:t>Pitch Deck</a:t>
+            </a:r>
+          </a:p>
+        </p:txBody>
+      </p:sp>
+      <p:sp>
+        <p:nvSpPr>
+          <p:cNvPr id="6" name="Slide Number Placeholder 5">
+            <a:extLst>
+              <a:ext uri="{FF2B5EF4-FFF2-40B4-BE49-F238E27FC236}">
+                <a16:creationId xmlns:a16="http://schemas.microsoft.com/office/drawing/2014/main" id="{C23C3221-5F04-4CA7-A86A-EEA8566A1735}"/>
+              </a:ext>
+            </a:extLst>
+          </p:cNvPr>
+          <p:cNvSpPr>
+            <a:spLocks noGrp="1"/>
+          </p:cNvSpPr>
+          <p:nvPr>
+            <p:ph type="sldNum" sz="quarter" idx="12"/>
+          </p:nvPr>
+        </p:nvSpPr>
+        <p:spPr>
+          <a:xfrm>
+            <a:off x="8610600" y="6356350"/>
+            <a:ext cx="2743200" cy="365125"/>
+          </a:xfrm>
+        </p:spPr>
+        <p:txBody>
+          <a:bodyPr/>
+          <a:lstStyle/>
+          <a:p>
+            <a:fld id="{B5CEABB6-07DC-46E8-9B57-56EC44A396E5}" type="slidenum">
+              <a:rPr lang="en-US" smtClean="0"/>
+              <a:pPr/>
+              <a:t>10</a:t>
+            </a:fld>
+            <a:endParaRPr lang="en-US" dirty="0"/>
+          </a:p>
+        </p:txBody>
+      </p:sp>
+    </p:spTree>
+    <p:extLst>
+      <p:ext uri="{BB962C8B-B14F-4D97-AF65-F5344CB8AC3E}">
+        <p14:creationId xmlns:p14="http://schemas.microsoft.com/office/powerpoint/2010/main" val="1346372204"/>
+      </p:ext>
+    </p:extLst>
+  </p:cSld>
+  <p:clrMapOvr>
+    <a:masterClrMapping/>
+  </p:clrMapOvr>
+</p:sld>
+</file>
+
+<file path=ppt/slides/slide11.xml><?xml version="1.0" encoding="utf-8"?>
+<p:sld xmlns:a="http://schemas.openxmlformats.org/drawingml/2006/main" xmlns:r="http://schemas.openxmlformats.org/officeDocument/2006/relationships" xmlns:p="http://schemas.openxmlformats.org/presentationml/2006/main">
+  <p:cSld>
+    <p:spTree>
+      <p:nvGrpSpPr>
+        <p:cNvPr id="1" name=""/>
+        <p:cNvGrpSpPr/>
+        <p:nvPr/>
+      </p:nvGrpSpPr>
+      <p:grpSpPr>
+        <a:xfrm>
+          <a:off x="0" y="0"/>
+          <a:ext cx="0" cy="0"/>
+          <a:chOff x="0" y="0"/>
+          <a:chExt cx="0" cy="0"/>
+        </a:xfrm>
+      </p:grpSpPr>
+      <p:sp>
+        <p:nvSpPr>
+          <p:cNvPr id="2" name="Title 1">
+            <a:extLst>
+              <a:ext uri="{FF2B5EF4-FFF2-40B4-BE49-F238E27FC236}">
+                <a16:creationId xmlns:a16="http://schemas.microsoft.com/office/drawing/2014/main" id="{8A4E0A63-A388-49B1-A04E-27CE9BD622EF}"/>
+              </a:ext>
+            </a:extLst>
+          </p:cNvPr>
+          <p:cNvSpPr>
+            <a:spLocks noGrp="1"/>
+          </p:cNvSpPr>
+          <p:nvPr>
+            <p:ph type="title"/>
+          </p:nvPr>
+        </p:nvSpPr>
+        <p:spPr>
+          <a:xfrm>
+            <a:off x="669152" y="1152771"/>
+            <a:ext cx="5431971" cy="846301"/>
+          </a:xfrm>
+        </p:spPr>
+        <p:txBody>
+          <a:bodyPr/>
+          <a:lstStyle/>
+          <a:p>
+            <a:r>
+              <a:rPr lang="en-US" dirty="0"/>
+              <a:t>TRY David OUT NOW</a:t>
+            </a:r>
+          </a:p>
+        </p:txBody>
+      </p:sp>
+      <p:sp>
+        <p:nvSpPr>
+          <p:cNvPr id="6" name="Text Placeholder 5">
+            <a:extLst>
+              <a:ext uri="{FF2B5EF4-FFF2-40B4-BE49-F238E27FC236}">
+                <a16:creationId xmlns:a16="http://schemas.microsoft.com/office/drawing/2014/main" id="{7640DF9D-0C9E-4C5D-9635-6B4DE10CCEE5}"/>
+              </a:ext>
+            </a:extLst>
+          </p:cNvPr>
+          <p:cNvSpPr>
+            <a:spLocks noGrp="1"/>
+          </p:cNvSpPr>
+          <p:nvPr>
+            <p:ph type="body" sz="quarter" idx="13"/>
+          </p:nvPr>
+        </p:nvSpPr>
+        <p:spPr>
+          <a:xfrm>
+            <a:off x="671237" y="2469515"/>
+            <a:ext cx="5433204" cy="365125"/>
+          </a:xfrm>
+        </p:spPr>
+        <p:txBody>
+          <a:bodyPr vert="horz" lIns="91440" tIns="45720" rIns="91440" bIns="45720" rtlCol="0" anchor="t">
+            <a:noAutofit/>
+          </a:bodyPr>
+          <a:lstStyle/>
+          <a:p>
+            <a:r>
+              <a:rPr lang="en-US" noProof="1"/>
+              <a:t>LIVE AT</a:t>
+            </a:r>
+          </a:p>
+        </p:txBody>
+      </p:sp>
+      <p:sp>
+        <p:nvSpPr>
+          <p:cNvPr id="7" name="Text Placeholder 6">
+            <a:extLst>
+              <a:ext uri="{FF2B5EF4-FFF2-40B4-BE49-F238E27FC236}">
+                <a16:creationId xmlns:a16="http://schemas.microsoft.com/office/drawing/2014/main" id="{40297407-CE4E-4284-879D-AEC395713625}"/>
+              </a:ext>
+            </a:extLst>
+          </p:cNvPr>
+          <p:cNvSpPr>
+            <a:spLocks noGrp="1"/>
+          </p:cNvSpPr>
+          <p:nvPr>
+            <p:ph type="body" sz="quarter" idx="15"/>
+          </p:nvPr>
+        </p:nvSpPr>
+        <p:spPr>
+          <a:xfrm>
+            <a:off x="670811" y="2798940"/>
+            <a:ext cx="5431971" cy="557950"/>
+          </a:xfrm>
+        </p:spPr>
+        <p:txBody>
+          <a:bodyPr>
+            <a:normAutofit lnSpcReduction="10000"/>
+          </a:bodyPr>
+          <a:lstStyle/>
+          <a:p>
+            <a:r>
+              <a:rPr lang="en-US" sz="3200" b="1" noProof="1">
+                <a:solidFill>
+                  <a:srgbClr val="B85042"/>
+                </a:solidFill>
+              </a:rPr>
+              <a:t>qhack.mehdy.eu</a:t>
+            </a:r>
+          </a:p>
+        </p:txBody>
+      </p:sp>
+      <p:sp>
+        <p:nvSpPr>
+          <p:cNvPr id="8" name="Text Placeholder 7">
+            <a:extLst>
+              <a:ext uri="{FF2B5EF4-FFF2-40B4-BE49-F238E27FC236}">
+                <a16:creationId xmlns:a16="http://schemas.microsoft.com/office/drawing/2014/main" id="{F5C3A7BE-F7FC-4942-A31A-491A8A806103}"/>
+              </a:ext>
+            </a:extLst>
+          </p:cNvPr>
+          <p:cNvSpPr>
+            <a:spLocks noGrp="1"/>
+          </p:cNvSpPr>
+          <p:nvPr>
+            <p:ph type="body" sz="quarter" idx="23"/>
+          </p:nvPr>
+        </p:nvSpPr>
+        <p:spPr>
+          <a:xfrm>
+            <a:off x="671237" y="3569311"/>
+            <a:ext cx="5433204" cy="365125"/>
+          </a:xfrm>
+        </p:spPr>
+        <p:txBody>
+          <a:bodyPr vert="horz" lIns="91440" tIns="45720" rIns="91440" bIns="45720" rtlCol="0" anchor="t">
+            <a:noAutofit/>
+          </a:bodyPr>
+          <a:lstStyle/>
+          <a:p>
+            <a:r>
+              <a:rPr lang="en-US" noProof="1"/>
+              <a:t>BUILT WITH</a:t>
+            </a:r>
+          </a:p>
+        </p:txBody>
+      </p:sp>
+      <p:sp>
+        <p:nvSpPr>
+          <p:cNvPr id="9" name="Text Placeholder 8">
+            <a:extLst>
+              <a:ext uri="{FF2B5EF4-FFF2-40B4-BE49-F238E27FC236}">
+                <a16:creationId xmlns:a16="http://schemas.microsoft.com/office/drawing/2014/main" id="{95CCE699-03D1-4642-B46A-B14EF17DA183}"/>
+              </a:ext>
+            </a:extLst>
+          </p:cNvPr>
+          <p:cNvSpPr>
+            <a:spLocks noGrp="1"/>
+          </p:cNvSpPr>
+          <p:nvPr>
+            <p:ph type="body" sz="quarter" idx="24"/>
+          </p:nvPr>
+        </p:nvSpPr>
+        <p:spPr>
+          <a:xfrm>
+            <a:off x="670811" y="3898736"/>
+            <a:ext cx="5431971" cy="557950"/>
           </a:xfrm>
         </p:spPr>
         <p:txBody>
@@ -17452,6 +17794,311 @@
           <a:lstStyle/>
           <a:p>
             <a:r>
+              <a:rPr lang="en-US" noProof="1"/>
+              <a:t>Next.js + FastAPI  •  Google Cloud APIs  •  Claude</a:t>
+            </a:r>
+          </a:p>
+        </p:txBody>
+      </p:sp>
+      <p:sp>
+        <p:nvSpPr>
+          <p:cNvPr id="10" name="Text Placeholder 9">
+            <a:extLst>
+              <a:ext uri="{FF2B5EF4-FFF2-40B4-BE49-F238E27FC236}">
+                <a16:creationId xmlns:a16="http://schemas.microsoft.com/office/drawing/2014/main" id="{BC1DF189-6F2F-4C21-88CC-C82D3D0D147B}"/>
+              </a:ext>
+            </a:extLst>
+          </p:cNvPr>
+          <p:cNvSpPr>
+            <a:spLocks noGrp="1"/>
+          </p:cNvSpPr>
+          <p:nvPr>
+            <p:ph type="body" sz="quarter" idx="25"/>
+          </p:nvPr>
+        </p:nvSpPr>
+        <p:spPr>
+          <a:xfrm>
+            <a:off x="669152" y="4486544"/>
+            <a:ext cx="3112422" cy="365125"/>
+          </a:xfrm>
+        </p:spPr>
+        <p:txBody>
+          <a:bodyPr vert="horz" lIns="91440" tIns="45720" rIns="91440" bIns="45720" rtlCol="0" anchor="t">
+            <a:normAutofit lnSpcReduction="10000"/>
+          </a:bodyPr>
+          <a:lstStyle/>
+          <a:p>
+            <a:r>
+              <a:rPr lang="en-US" noProof="1"/>
+              <a:t>Hosted with &lt;3</a:t>
+            </a:r>
+          </a:p>
+        </p:txBody>
+      </p:sp>
+      <p:sp>
+        <p:nvSpPr>
+          <p:cNvPr id="32" name="Date Placeholder 31">
+            <a:extLst>
+              <a:ext uri="{FF2B5EF4-FFF2-40B4-BE49-F238E27FC236}">
+                <a16:creationId xmlns:a16="http://schemas.microsoft.com/office/drawing/2014/main" id="{D5DB19F8-B538-4965-BA90-ED372B99F5DC}"/>
+              </a:ext>
+            </a:extLst>
+          </p:cNvPr>
+          <p:cNvSpPr>
+            <a:spLocks noGrp="1"/>
+          </p:cNvSpPr>
+          <p:nvPr>
+            <p:ph type="dt" sz="half" idx="20"/>
+          </p:nvPr>
+        </p:nvSpPr>
+        <p:spPr>
+          <a:xfrm>
+            <a:off x="5919680" y="6356350"/>
+            <a:ext cx="947516" cy="365125"/>
+          </a:xfrm>
+        </p:spPr>
+        <p:txBody>
+          <a:bodyPr/>
+          <a:lstStyle/>
+          <a:p>
+            <a:r>
+              <a:rPr lang="en-US" dirty="0"/>
+              <a:t>2026</a:t>
+            </a:r>
+          </a:p>
+        </p:txBody>
+      </p:sp>
+      <p:sp>
+        <p:nvSpPr>
+          <p:cNvPr id="3" name="Footer Placeholder 2">
+            <a:extLst>
+              <a:ext uri="{FF2B5EF4-FFF2-40B4-BE49-F238E27FC236}">
+                <a16:creationId xmlns:a16="http://schemas.microsoft.com/office/drawing/2014/main" id="{005C44B1-BA82-483C-BD91-F89067442F9E}"/>
+              </a:ext>
+            </a:extLst>
+          </p:cNvPr>
+          <p:cNvSpPr>
+            <a:spLocks noGrp="1"/>
+          </p:cNvSpPr>
+          <p:nvPr>
+            <p:ph type="ftr" sz="quarter" idx="21"/>
+          </p:nvPr>
+        </p:nvSpPr>
+        <p:spPr>
+          <a:xfrm>
+            <a:off x="7161955" y="6356350"/>
+            <a:ext cx="3243942" cy="365125"/>
+          </a:xfrm>
+        </p:spPr>
+        <p:txBody>
+          <a:bodyPr/>
+          <a:lstStyle/>
+          <a:p>
+            <a:r>
+              <a:rPr lang="en-US" dirty="0"/>
+              <a:t>Pitch Deck</a:t>
+            </a:r>
+          </a:p>
+        </p:txBody>
+      </p:sp>
+      <p:sp>
+        <p:nvSpPr>
+          <p:cNvPr id="4" name="Slide Number Placeholder 3">
+            <a:extLst>
+              <a:ext uri="{FF2B5EF4-FFF2-40B4-BE49-F238E27FC236}">
+                <a16:creationId xmlns:a16="http://schemas.microsoft.com/office/drawing/2014/main" id="{79ED4A67-3A46-4F54-A12A-EAE1B53E6457}"/>
+              </a:ext>
+            </a:extLst>
+          </p:cNvPr>
+          <p:cNvSpPr>
+            <a:spLocks noGrp="1"/>
+          </p:cNvSpPr>
+          <p:nvPr>
+            <p:ph type="sldNum" sz="quarter" idx="22"/>
+          </p:nvPr>
+        </p:nvSpPr>
+        <p:spPr>
+          <a:xfrm>
+            <a:off x="10700656" y="6356350"/>
+            <a:ext cx="653143" cy="365125"/>
+          </a:xfrm>
+        </p:spPr>
+        <p:txBody>
+          <a:bodyPr/>
+          <a:lstStyle/>
+          <a:p>
+            <a:fld id="{19B51A1E-902D-48AF-9020-955120F399B6}" type="slidenum">
+              <a:rPr lang="en-US" smtClean="0"/>
+              <a:pPr/>
+              <a:t>11</a:t>
+            </a:fld>
+            <a:endParaRPr lang="en-US" dirty="0"/>
+          </a:p>
+        </p:txBody>
+      </p:sp>
+      <p:pic>
+        <p:nvPicPr>
+          <p:cNvPr id="16" name="Picture 15">
+            <a:extLst>
+              <a:ext uri="{FF2B5EF4-FFF2-40B4-BE49-F238E27FC236}">
+                <a16:creationId xmlns:a16="http://schemas.microsoft.com/office/drawing/2014/main" id="{595A97EE-6711-1DC7-846A-AE3EF410398C}"/>
+              </a:ext>
+            </a:extLst>
+          </p:cNvPr>
+          <p:cNvPicPr>
+            <a:picLocks noChangeAspect="1"/>
+          </p:cNvPicPr>
+          <p:nvPr/>
+        </p:nvPicPr>
+        <p:blipFill>
+          <a:blip r:embed="rId2"/>
+          <a:srcRect l="2749" t="22970" b="31916"/>
+          <a:stretch>
+            <a:fillRect/>
+          </a:stretch>
+        </p:blipFill>
+        <p:spPr>
+          <a:xfrm>
+            <a:off x="759684" y="4851669"/>
+            <a:ext cx="1859078" cy="1533122"/>
+          </a:xfrm>
+          <a:prstGeom prst="rect">
+            <a:avLst/>
+          </a:prstGeom>
+        </p:spPr>
+      </p:pic>
+      <p:pic>
+        <p:nvPicPr>
+          <p:cNvPr id="18" name="Picture 17">
+            <a:extLst>
+              <a:ext uri="{FF2B5EF4-FFF2-40B4-BE49-F238E27FC236}">
+                <a16:creationId xmlns:a16="http://schemas.microsoft.com/office/drawing/2014/main" id="{569C4708-DC6A-A26C-02D6-BABD852A30F8}"/>
+              </a:ext>
+            </a:extLst>
+          </p:cNvPr>
+          <p:cNvPicPr>
+            <a:picLocks noChangeAspect="1"/>
+          </p:cNvPicPr>
+          <p:nvPr/>
+        </p:nvPicPr>
+        <p:blipFill>
+          <a:blip r:embed="rId3"/>
+          <a:stretch>
+            <a:fillRect/>
+          </a:stretch>
+        </p:blipFill>
+        <p:spPr>
+          <a:xfrm>
+            <a:off x="6096000" y="801231"/>
+            <a:ext cx="5255537" cy="5255537"/>
+          </a:xfrm>
+          <a:prstGeom prst="rect">
+            <a:avLst/>
+          </a:prstGeom>
+        </p:spPr>
+      </p:pic>
+    </p:spTree>
+    <p:extLst>
+      <p:ext uri="{BB962C8B-B14F-4D97-AF65-F5344CB8AC3E}">
+        <p14:creationId xmlns:p14="http://schemas.microsoft.com/office/powerpoint/2010/main" val="2069393026"/>
+      </p:ext>
+    </p:extLst>
+  </p:cSld>
+  <p:clrMapOvr>
+    <a:masterClrMapping/>
+  </p:clrMapOvr>
+</p:sld>
+</file>
+
+<file path=ppt/slides/slide12.xml><?xml version="1.0" encoding="utf-8"?>
+<p:sld xmlns:a="http://schemas.openxmlformats.org/drawingml/2006/main" xmlns:r="http://schemas.openxmlformats.org/officeDocument/2006/relationships" xmlns:p="http://schemas.openxmlformats.org/presentationml/2006/main">
+  <p:cSld>
+    <p:spTree>
+      <p:nvGrpSpPr>
+        <p:cNvPr id="1" name=""/>
+        <p:cNvGrpSpPr/>
+        <p:nvPr/>
+      </p:nvGrpSpPr>
+      <p:grpSpPr>
+        <a:xfrm>
+          <a:off x="0" y="0"/>
+          <a:ext cx="0" cy="0"/>
+          <a:chOff x="0" y="0"/>
+          <a:chExt cx="0" cy="0"/>
+        </a:xfrm>
+      </p:grpSpPr>
+      <p:sp>
+        <p:nvSpPr>
+          <p:cNvPr id="2" name="Title 1">
+            <a:extLst>
+              <a:ext uri="{FF2B5EF4-FFF2-40B4-BE49-F238E27FC236}">
+                <a16:creationId xmlns:a16="http://schemas.microsoft.com/office/drawing/2014/main" id="{BCCAEE93-8585-46D4-A7EC-F184E317CB2E}"/>
+              </a:ext>
+            </a:extLst>
+          </p:cNvPr>
+          <p:cNvSpPr>
+            <a:spLocks noGrp="1"/>
+          </p:cNvSpPr>
+          <p:nvPr>
+            <p:ph type="ctrTitle"/>
+          </p:nvPr>
+        </p:nvSpPr>
+        <p:spPr>
+          <a:xfrm>
+            <a:off x="4267200" y="1615736"/>
+            <a:ext cx="4179570" cy="1524735"/>
+          </a:xfrm>
+        </p:spPr>
+        <p:txBody>
+          <a:bodyPr/>
+          <a:lstStyle/>
+          <a:p>
+            <a:r>
+              <a:rPr lang="en-US" dirty="0"/>
+              <a:t>THANK YOU</a:t>
+            </a:r>
+          </a:p>
+          <a:p>
+            <a:r>
+              <a:rPr lang="en-US" sz="2800" i="1" dirty="0">
+                <a:solidFill>
+                  <a:srgbClr val="B85042"/>
+                </a:solidFill>
+              </a:rPr>
+              <a:t>&amp; questions</a:t>
+            </a:r>
+          </a:p>
+        </p:txBody>
+      </p:sp>
+      <p:sp>
+        <p:nvSpPr>
+          <p:cNvPr id="3" name="Content Placeholder 2">
+            <a:extLst>
+              <a:ext uri="{FF2B5EF4-FFF2-40B4-BE49-F238E27FC236}">
+                <a16:creationId xmlns:a16="http://schemas.microsoft.com/office/drawing/2014/main" id="{24AFFC60-19C3-4901-93F7-7AAF4C09F8C6}"/>
+              </a:ext>
+            </a:extLst>
+          </p:cNvPr>
+          <p:cNvSpPr>
+            <a:spLocks noGrp="1"/>
+          </p:cNvSpPr>
+          <p:nvPr>
+            <p:ph type="subTitle" idx="1"/>
+          </p:nvPr>
+        </p:nvSpPr>
+        <p:spPr>
+          <a:xfrm>
+            <a:off x="4267200" y="3238103"/>
+            <a:ext cx="4179570" cy="2004161"/>
+          </a:xfrm>
+        </p:spPr>
+        <p:txBody>
+          <a:bodyPr>
+            <a:normAutofit/>
+          </a:bodyPr>
+          <a:lstStyle/>
+          <a:p>
+            <a:r>
               <a:rPr lang="en-US" b="1" dirty="0"/>
               <a:t>Segfault after Midnight</a:t>
             </a:r>
@@ -17572,7 +18219,7 @@
             <a:fld id="{B5CEABB6-07DC-46E8-9B57-56EC44A396E5}" type="slidenum">
               <a:rPr lang="en-US" smtClean="0"/>
               <a:pPr/>
-              <a:t>10</a:t>
+              <a:t>12</a:t>
             </a:fld>
             <a:endParaRPr lang="en-US" dirty="0"/>
           </a:p>
@@ -18009,14 +18656,15 @@
         </p:nvPicPr>
         <p:blipFill>
           <a:blip r:embed="rId2"/>
+          <a:srcRect t="20737"/>
           <a:stretch>
             <a:fillRect/>
           </a:stretch>
         </p:blipFill>
         <p:spPr>
           <a:xfrm>
-            <a:off x="2588405" y="347344"/>
-            <a:ext cx="7256396" cy="6009005"/>
+            <a:off x="2588405" y="923454"/>
+            <a:ext cx="7256396" cy="4762939"/>
           </a:xfrm>
           <a:prstGeom prst="rect">
             <a:avLst/>
@@ -18202,6 +18850,340 @@
   <p:cSld>
     <p:spTree>
       <p:nvGrpSpPr>
+        <p:cNvPr id="1" name="">
+          <a:extLst>
+            <a:ext uri="{FF2B5EF4-FFF2-40B4-BE49-F238E27FC236}">
+              <a16:creationId xmlns:a16="http://schemas.microsoft.com/office/drawing/2014/main" id="{7C83536C-593E-4310-CA46-AFEB3A846746}"/>
+            </a:ext>
+          </a:extLst>
+        </p:cNvPr>
+        <p:cNvGrpSpPr/>
+        <p:nvPr/>
+      </p:nvGrpSpPr>
+      <p:grpSpPr>
+        <a:xfrm>
+          <a:off x="0" y="0"/>
+          <a:ext cx="0" cy="0"/>
+          <a:chOff x="0" y="0"/>
+          <a:chExt cx="0" cy="0"/>
+        </a:xfrm>
+      </p:grpSpPr>
+      <p:sp>
+        <p:nvSpPr>
+          <p:cNvPr id="6" name="Date Placeholder 5">
+            <a:extLst>
+              <a:ext uri="{FF2B5EF4-FFF2-40B4-BE49-F238E27FC236}">
+                <a16:creationId xmlns:a16="http://schemas.microsoft.com/office/drawing/2014/main" id="{302F2C26-EE61-D5F0-C941-0F261ECA3191}"/>
+              </a:ext>
+            </a:extLst>
+          </p:cNvPr>
+          <p:cNvSpPr>
+            <a:spLocks noGrp="1"/>
+          </p:cNvSpPr>
+          <p:nvPr>
+            <p:ph type="dt" sz="half" idx="10"/>
+          </p:nvPr>
+        </p:nvSpPr>
+        <p:spPr>
+          <a:xfrm>
+            <a:off x="1333500" y="6356350"/>
+            <a:ext cx="985157" cy="365125"/>
+          </a:xfrm>
+        </p:spPr>
+        <p:txBody>
+          <a:bodyPr/>
+          <a:lstStyle/>
+          <a:p>
+            <a:r>
+              <a:rPr lang="en-US" dirty="0"/>
+              <a:t>2026</a:t>
+            </a:r>
+          </a:p>
+        </p:txBody>
+      </p:sp>
+      <p:sp>
+        <p:nvSpPr>
+          <p:cNvPr id="5" name="Footer Placeholder 4">
+            <a:extLst>
+              <a:ext uri="{FF2B5EF4-FFF2-40B4-BE49-F238E27FC236}">
+                <a16:creationId xmlns:a16="http://schemas.microsoft.com/office/drawing/2014/main" id="{86B3955E-5DD6-AD6B-5132-64335078A7DF}"/>
+              </a:ext>
+            </a:extLst>
+          </p:cNvPr>
+          <p:cNvSpPr>
+            <a:spLocks noGrp="1"/>
+          </p:cNvSpPr>
+          <p:nvPr>
+            <p:ph type="ftr" sz="quarter" idx="11"/>
+          </p:nvPr>
+        </p:nvSpPr>
+        <p:spPr>
+          <a:xfrm>
+            <a:off x="2669886" y="6356349"/>
+            <a:ext cx="2482842" cy="365125"/>
+          </a:xfrm>
+        </p:spPr>
+        <p:txBody>
+          <a:bodyPr/>
+          <a:lstStyle/>
+          <a:p>
+            <a:r>
+              <a:rPr lang="en-US" dirty="0"/>
+              <a:t>Pitch Deck</a:t>
+            </a:r>
+          </a:p>
+        </p:txBody>
+      </p:sp>
+      <p:sp>
+        <p:nvSpPr>
+          <p:cNvPr id="4" name="Slide Number Placeholder 3">
+            <a:extLst>
+              <a:ext uri="{FF2B5EF4-FFF2-40B4-BE49-F238E27FC236}">
+                <a16:creationId xmlns:a16="http://schemas.microsoft.com/office/drawing/2014/main" id="{35F4BCC0-03BD-82C7-A8B7-0374691E00C7}"/>
+              </a:ext>
+            </a:extLst>
+          </p:cNvPr>
+          <p:cNvSpPr>
+            <a:spLocks noGrp="1"/>
+          </p:cNvSpPr>
+          <p:nvPr>
+            <p:ph type="sldNum" sz="quarter" idx="12"/>
+          </p:nvPr>
+        </p:nvSpPr>
+        <p:spPr>
+          <a:xfrm>
+            <a:off x="5536305" y="6356350"/>
+            <a:ext cx="987552" cy="365125"/>
+          </a:xfrm>
+        </p:spPr>
+        <p:txBody>
+          <a:bodyPr/>
+          <a:lstStyle/>
+          <a:p>
+            <a:fld id="{19B51A1E-902D-48AF-9020-955120F399B6}" type="slidenum">
+              <a:rPr lang="en-US" smtClean="0"/>
+              <a:pPr/>
+              <a:t>6</a:t>
+            </a:fld>
+            <a:endParaRPr lang="en-US" dirty="0"/>
+          </a:p>
+        </p:txBody>
+      </p:sp>
+      <p:pic>
+        <p:nvPicPr>
+          <p:cNvPr id="3" name="Picture 2">
+            <a:extLst>
+              <a:ext uri="{FF2B5EF4-FFF2-40B4-BE49-F238E27FC236}">
+                <a16:creationId xmlns:a16="http://schemas.microsoft.com/office/drawing/2014/main" id="{6219AF73-2CD3-87B5-903E-6459738E91F1}"/>
+              </a:ext>
+            </a:extLst>
+          </p:cNvPr>
+          <p:cNvPicPr>
+            <a:picLocks noChangeAspect="1"/>
+          </p:cNvPicPr>
+          <p:nvPr/>
+        </p:nvPicPr>
+        <p:blipFill>
+          <a:blip r:embed="rId2"/>
+          <a:stretch>
+            <a:fillRect/>
+          </a:stretch>
+        </p:blipFill>
+        <p:spPr>
+          <a:xfrm>
+            <a:off x="2492882" y="235389"/>
+            <a:ext cx="7299680" cy="6011502"/>
+          </a:xfrm>
+          <a:prstGeom prst="rect">
+            <a:avLst/>
+          </a:prstGeom>
+        </p:spPr>
+      </p:pic>
+    </p:spTree>
+    <p:extLst>
+      <p:ext uri="{BB962C8B-B14F-4D97-AF65-F5344CB8AC3E}">
+        <p14:creationId xmlns:p14="http://schemas.microsoft.com/office/powerpoint/2010/main" val="3452210743"/>
+      </p:ext>
+    </p:extLst>
+  </p:cSld>
+  <p:clrMapOvr>
+    <a:masterClrMapping/>
+  </p:clrMapOvr>
+</p:sld>
+</file>
+
+<file path=ppt/slides/slide7.xml><?xml version="1.0" encoding="utf-8"?>
+<p:sld xmlns:a="http://schemas.openxmlformats.org/drawingml/2006/main" xmlns:r="http://schemas.openxmlformats.org/officeDocument/2006/relationships" xmlns:p="http://schemas.openxmlformats.org/presentationml/2006/main">
+  <p:cSld>
+    <p:spTree>
+      <p:nvGrpSpPr>
+        <p:cNvPr id="1" name="">
+          <a:extLst>
+            <a:ext uri="{FF2B5EF4-FFF2-40B4-BE49-F238E27FC236}">
+              <a16:creationId xmlns:a16="http://schemas.microsoft.com/office/drawing/2014/main" id="{7A856EB9-1DE1-DA0F-2EB9-40B12BAD3726}"/>
+            </a:ext>
+          </a:extLst>
+        </p:cNvPr>
+        <p:cNvGrpSpPr/>
+        <p:nvPr/>
+      </p:nvGrpSpPr>
+      <p:grpSpPr>
+        <a:xfrm>
+          <a:off x="0" y="0"/>
+          <a:ext cx="0" cy="0"/>
+          <a:chOff x="0" y="0"/>
+          <a:chExt cx="0" cy="0"/>
+        </a:xfrm>
+      </p:grpSpPr>
+      <p:sp>
+        <p:nvSpPr>
+          <p:cNvPr id="6" name="Date Placeholder 5">
+            <a:extLst>
+              <a:ext uri="{FF2B5EF4-FFF2-40B4-BE49-F238E27FC236}">
+                <a16:creationId xmlns:a16="http://schemas.microsoft.com/office/drawing/2014/main" id="{A2E8E4C0-7345-420A-6D81-B5B8E60C8AA9}"/>
+              </a:ext>
+            </a:extLst>
+          </p:cNvPr>
+          <p:cNvSpPr>
+            <a:spLocks noGrp="1"/>
+          </p:cNvSpPr>
+          <p:nvPr>
+            <p:ph type="dt" sz="half" idx="10"/>
+          </p:nvPr>
+        </p:nvSpPr>
+        <p:spPr>
+          <a:xfrm>
+            <a:off x="1333500" y="6356350"/>
+            <a:ext cx="985157" cy="365125"/>
+          </a:xfrm>
+        </p:spPr>
+        <p:txBody>
+          <a:bodyPr/>
+          <a:lstStyle/>
+          <a:p>
+            <a:r>
+              <a:rPr lang="en-US" dirty="0"/>
+              <a:t>2026</a:t>
+            </a:r>
+          </a:p>
+        </p:txBody>
+      </p:sp>
+      <p:sp>
+        <p:nvSpPr>
+          <p:cNvPr id="5" name="Footer Placeholder 4">
+            <a:extLst>
+              <a:ext uri="{FF2B5EF4-FFF2-40B4-BE49-F238E27FC236}">
+                <a16:creationId xmlns:a16="http://schemas.microsoft.com/office/drawing/2014/main" id="{6FB3FDC4-386B-837B-E488-C655626F9956}"/>
+              </a:ext>
+            </a:extLst>
+          </p:cNvPr>
+          <p:cNvSpPr>
+            <a:spLocks noGrp="1"/>
+          </p:cNvSpPr>
+          <p:nvPr>
+            <p:ph type="ftr" sz="quarter" idx="11"/>
+          </p:nvPr>
+        </p:nvSpPr>
+        <p:spPr>
+          <a:xfrm>
+            <a:off x="2669886" y="6356349"/>
+            <a:ext cx="2482842" cy="365125"/>
+          </a:xfrm>
+        </p:spPr>
+        <p:txBody>
+          <a:bodyPr/>
+          <a:lstStyle/>
+          <a:p>
+            <a:r>
+              <a:rPr lang="en-US" dirty="0"/>
+              <a:t>Pitch Deck</a:t>
+            </a:r>
+          </a:p>
+        </p:txBody>
+      </p:sp>
+      <p:sp>
+        <p:nvSpPr>
+          <p:cNvPr id="4" name="Slide Number Placeholder 3">
+            <a:extLst>
+              <a:ext uri="{FF2B5EF4-FFF2-40B4-BE49-F238E27FC236}">
+                <a16:creationId xmlns:a16="http://schemas.microsoft.com/office/drawing/2014/main" id="{5238D3BD-0D4E-AC7C-DD69-54B8B8FAB2CC}"/>
+              </a:ext>
+            </a:extLst>
+          </p:cNvPr>
+          <p:cNvSpPr>
+            <a:spLocks noGrp="1"/>
+          </p:cNvSpPr>
+          <p:nvPr>
+            <p:ph type="sldNum" sz="quarter" idx="12"/>
+          </p:nvPr>
+        </p:nvSpPr>
+        <p:spPr>
+          <a:xfrm>
+            <a:off x="5536305" y="6356350"/>
+            <a:ext cx="987552" cy="365125"/>
+          </a:xfrm>
+        </p:spPr>
+        <p:txBody>
+          <a:bodyPr/>
+          <a:lstStyle/>
+          <a:p>
+            <a:fld id="{19B51A1E-902D-48AF-9020-955120F399B6}" type="slidenum">
+              <a:rPr lang="en-US" smtClean="0"/>
+              <a:pPr/>
+              <a:t>7</a:t>
+            </a:fld>
+            <a:endParaRPr lang="en-US" dirty="0"/>
+          </a:p>
+        </p:txBody>
+      </p:sp>
+      <p:pic>
+        <p:nvPicPr>
+          <p:cNvPr id="3" name="Picture 2">
+            <a:extLst>
+              <a:ext uri="{FF2B5EF4-FFF2-40B4-BE49-F238E27FC236}">
+                <a16:creationId xmlns:a16="http://schemas.microsoft.com/office/drawing/2014/main" id="{332062A6-7937-FA86-B488-4C38C6670E6D}"/>
+              </a:ext>
+            </a:extLst>
+          </p:cNvPr>
+          <p:cNvPicPr>
+            <a:picLocks noChangeAspect="1"/>
+          </p:cNvPicPr>
+          <p:nvPr/>
+        </p:nvPicPr>
+        <p:blipFill>
+          <a:blip r:embed="rId2"/>
+          <a:stretch>
+            <a:fillRect/>
+          </a:stretch>
+        </p:blipFill>
+        <p:spPr>
+          <a:xfrm>
+            <a:off x="2899916" y="221393"/>
+            <a:ext cx="6392167" cy="6134956"/>
+          </a:xfrm>
+          <a:prstGeom prst="rect">
+            <a:avLst/>
+          </a:prstGeom>
+        </p:spPr>
+      </p:pic>
+    </p:spTree>
+    <p:extLst>
+      <p:ext uri="{BB962C8B-B14F-4D97-AF65-F5344CB8AC3E}">
+        <p14:creationId xmlns:p14="http://schemas.microsoft.com/office/powerpoint/2010/main" val="54102110"/>
+      </p:ext>
+    </p:extLst>
+  </p:cSld>
+  <p:clrMapOvr>
+    <a:masterClrMapping/>
+  </p:clrMapOvr>
+</p:sld>
+</file>
+
+<file path=ppt/slides/slide8.xml><?xml version="1.0" encoding="utf-8"?>
+<p:sld xmlns:a="http://schemas.openxmlformats.org/drawingml/2006/main" xmlns:r="http://schemas.openxmlformats.org/officeDocument/2006/relationships" xmlns:p="http://schemas.openxmlformats.org/presentationml/2006/main">
+  <p:cSld>
+    <p:spTree>
+      <p:nvGrpSpPr>
         <p:cNvPr id="1" name=""/>
         <p:cNvGrpSpPr/>
         <p:nvPr/>
@@ -18309,7 +19291,7 @@
             <a:fld id="{B5CEABB6-07DC-46E8-9B57-56EC44A396E5}" type="slidenum">
               <a:rPr lang="en-US" smtClean="0"/>
               <a:pPr/>
-              <a:t>6</a:t>
+              <a:t>8</a:t>
             </a:fld>
             <a:endParaRPr lang="en-US" dirty="0"/>
           </a:p>
@@ -18500,7 +19482,7 @@
         </p:nvSpPr>
         <p:spPr>
           <a:xfrm>
-            <a:off x="5989320" y="1899403"/>
+            <a:off x="5989320" y="1926562"/>
             <a:ext cx="201168" cy="182880"/>
           </a:xfrm>
           <a:prstGeom prst="downArrow">
@@ -19679,613 +20661,6 @@
 </p:sld>
 </file>
 
-<file path=ppt/slides/slide7.xml><?xml version="1.0" encoding="utf-8"?>
-<p:sld xmlns:a="http://schemas.openxmlformats.org/drawingml/2006/main" xmlns:r="http://schemas.openxmlformats.org/officeDocument/2006/relationships" xmlns:p="http://schemas.openxmlformats.org/presentationml/2006/main">
-  <p:cSld>
-    <p:spTree>
-      <p:nvGrpSpPr>
-        <p:cNvPr id="1" name=""/>
-        <p:cNvGrpSpPr/>
-        <p:nvPr/>
-      </p:nvGrpSpPr>
-      <p:grpSpPr>
-        <a:xfrm>
-          <a:off x="0" y="0"/>
-          <a:ext cx="0" cy="0"/>
-          <a:chOff x="0" y="0"/>
-          <a:chExt cx="0" cy="0"/>
-        </a:xfrm>
-      </p:grpSpPr>
-      <p:sp>
-        <p:nvSpPr>
-          <p:cNvPr id="4" name="Title 3">
-            <a:extLst>
-              <a:ext uri="{FF2B5EF4-FFF2-40B4-BE49-F238E27FC236}">
-                <a16:creationId xmlns:a16="http://schemas.microsoft.com/office/drawing/2014/main" id="{FAD2AE59-5630-4D5C-83A9-4CDEF4D7DCFB}"/>
-              </a:ext>
-            </a:extLst>
-          </p:cNvPr>
-          <p:cNvSpPr>
-            <a:spLocks noGrp="1"/>
-          </p:cNvSpPr>
-          <p:nvPr>
-            <p:ph type="title"/>
-          </p:nvPr>
-        </p:nvSpPr>
-        <p:spPr>
-          <a:xfrm>
-            <a:off x="2933700" y="892177"/>
-            <a:ext cx="8421688" cy="1325563"/>
-          </a:xfrm>
-        </p:spPr>
-        <p:txBody>
-          <a:bodyPr/>
-          <a:lstStyle/>
-          <a:p>
-            <a:r>
-              <a:rPr lang="en-US" dirty="0"/>
-              <a:t>CHALLENGE VS. OUR BUILD</a:t>
-            </a:r>
-          </a:p>
-        </p:txBody>
-      </p:sp>
-      <p:sp>
-        <p:nvSpPr>
-          <p:cNvPr id="5" name="Text Placeholder 4">
-            <a:extLst>
-              <a:ext uri="{FF2B5EF4-FFF2-40B4-BE49-F238E27FC236}">
-                <a16:creationId xmlns:a16="http://schemas.microsoft.com/office/drawing/2014/main" id="{F8657664-A458-4DDD-ACC2-1D87FCD6FCA9}"/>
-              </a:ext>
-            </a:extLst>
-          </p:cNvPr>
-          <p:cNvSpPr>
-            <a:spLocks noGrp="1"/>
-          </p:cNvSpPr>
-          <p:nvPr>
-            <p:ph type="body" idx="1"/>
-          </p:nvPr>
-        </p:nvSpPr>
-        <p:spPr>
-          <a:xfrm>
-            <a:off x="2933700" y="2776936"/>
-            <a:ext cx="3924300" cy="823912"/>
-          </a:xfrm>
-        </p:spPr>
-        <p:txBody>
-          <a:bodyPr/>
-          <a:lstStyle/>
-          <a:p>
-            <a:r>
-              <a:rPr lang="en-US" dirty="0"/>
-              <a:t>CHALLENGE PILLARS</a:t>
-            </a:r>
-          </a:p>
-        </p:txBody>
-      </p:sp>
-      <p:sp>
-        <p:nvSpPr>
-          <p:cNvPr id="6" name="Content Placeholder 5">
-            <a:extLst>
-              <a:ext uri="{FF2B5EF4-FFF2-40B4-BE49-F238E27FC236}">
-                <a16:creationId xmlns:a16="http://schemas.microsoft.com/office/drawing/2014/main" id="{5A6B31B0-7B84-475D-961F-09C0191F91A2}"/>
-              </a:ext>
-            </a:extLst>
-          </p:cNvPr>
-          <p:cNvSpPr>
-            <a:spLocks noGrp="1"/>
-          </p:cNvSpPr>
-          <p:nvPr>
-            <p:ph sz="half" idx="2"/>
-          </p:nvPr>
-        </p:nvSpPr>
-        <p:spPr>
-          <a:xfrm>
-            <a:off x="2933700" y="3834606"/>
-            <a:ext cx="3924300" cy="1997867"/>
-          </a:xfrm>
-        </p:spPr>
-        <p:txBody>
-          <a:bodyPr vert="horz" lIns="91440" tIns="45720" rIns="91440" bIns="45720" rtlCol="0" anchor="t">
-            <a:normAutofit fontScale="92500" lnSpcReduction="10000"/>
-          </a:bodyPr>
-          <a:lstStyle/>
-          <a:p>
-            <a:r>
-              <a:rPr lang="en-US" b="1" noProof="1"/>
-              <a:t>Market &amp; regulatory context</a:t>
-            </a:r>
-            <a:br>
-              <a:rPr lang="en-US" noProof="1"/>
-            </a:br>
-            <a:r>
-              <a:rPr lang="en-US" noProof="1"/>
-              <a:t>Energy price trends, carbon pricing, subsidies, regulations, why now</a:t>
-            </a:r>
-          </a:p>
-          <a:p>
-            <a:r>
-              <a:rPr lang="en-US" b="1" noProof="1"/>
-              <a:t>Compelling offer</a:t>
-            </a:r>
-            <a:br>
-              <a:rPr lang="en-US" noProof="1"/>
-            </a:br>
-            <a:r>
-              <a:rPr lang="en-US" noProof="1"/>
-              <a:t>2–3 personalised packages at different levels of ambition with justifications</a:t>
-            </a:r>
-          </a:p>
-          <a:p>
-            <a:r>
-              <a:rPr lang="en-US" b="1" noProof="1"/>
-              <a:t>Financing strategy</a:t>
-            </a:r>
-            <a:br>
-              <a:rPr lang="en-US" noProof="1"/>
-            </a:br>
-            <a:r>
-              <a:rPr lang="en-US" noProof="1"/>
-              <a:t>Cash, partial financing, full financing scenarios with subsidies integrated</a:t>
-            </a:r>
-          </a:p>
-        </p:txBody>
-      </p:sp>
-      <p:sp>
-        <p:nvSpPr>
-          <p:cNvPr id="7" name="Text Placeholder 6">
-            <a:extLst>
-              <a:ext uri="{FF2B5EF4-FFF2-40B4-BE49-F238E27FC236}">
-                <a16:creationId xmlns:a16="http://schemas.microsoft.com/office/drawing/2014/main" id="{578017FE-712E-4E95-B483-B700F1AA4B2A}"/>
-              </a:ext>
-            </a:extLst>
-          </p:cNvPr>
-          <p:cNvSpPr>
-            <a:spLocks noGrp="1"/>
-          </p:cNvSpPr>
-          <p:nvPr>
-            <p:ph type="body" sz="quarter" idx="3"/>
-          </p:nvPr>
-        </p:nvSpPr>
-        <p:spPr>
-          <a:xfrm>
-            <a:off x="7410173" y="2776936"/>
-            <a:ext cx="3943627" cy="823912"/>
-          </a:xfrm>
-        </p:spPr>
-        <p:txBody>
-          <a:bodyPr/>
-          <a:lstStyle/>
-          <a:p>
-            <a:r>
-              <a:rPr lang="en-US" dirty="0"/>
-              <a:t>WHAT WE BUILT</a:t>
-            </a:r>
-          </a:p>
-        </p:txBody>
-      </p:sp>
-      <p:sp>
-        <p:nvSpPr>
-          <p:cNvPr id="11" name="Content Placeholder 10">
-            <a:extLst>
-              <a:ext uri="{FF2B5EF4-FFF2-40B4-BE49-F238E27FC236}">
-                <a16:creationId xmlns:a16="http://schemas.microsoft.com/office/drawing/2014/main" id="{D0E0ACA0-9139-4C37-920D-BF3C1FF461C1}"/>
-              </a:ext>
-            </a:extLst>
-          </p:cNvPr>
-          <p:cNvSpPr>
-            <a:spLocks noGrp="1"/>
-          </p:cNvSpPr>
-          <p:nvPr>
-            <p:ph sz="quarter" idx="4"/>
-          </p:nvPr>
-        </p:nvSpPr>
-        <p:spPr>
-          <a:xfrm>
-            <a:off x="7410173" y="3834606"/>
-            <a:ext cx="3943627" cy="1997867"/>
-          </a:xfrm>
-        </p:spPr>
-        <p:txBody>
-          <a:bodyPr>
-            <a:normAutofit fontScale="92500" lnSpcReduction="10000"/>
-          </a:bodyPr>
-          <a:lstStyle/>
-          <a:p>
-            <a:r>
-              <a:rPr lang="en-US" b="1" noProof="1"/>
-              <a:t>Sourcing via orchestrated agents</a:t>
-            </a:r>
-            <a:br>
-              <a:rPr lang="en-US" noProof="1"/>
-            </a:br>
-            <a:r>
-              <a:rPr lang="en-US" noProof="1"/>
-              <a:t>7 parallel agents: roof, solar, energy, subsidies, OSINT, market.</a:t>
-            </a:r>
-          </a:p>
-          <a:p>
-            <a:r>
-              <a:rPr lang="en-US" b="1" noProof="1"/>
-              <a:t>3 offer tiers + pitch assistant</a:t>
-            </a:r>
-            <a:br>
-              <a:rPr lang="en-US" noProof="1"/>
-            </a:br>
-            <a:r>
-              <a:rPr lang="en-US" noProof="1"/>
-              <a:t>Good / Better / Best with cash, loan and lease scenarios and concrete advice for sales pitch</a:t>
-            </a:r>
-          </a:p>
-          <a:p>
-            <a:r>
-              <a:rPr lang="en-US" b="1" noProof="1"/>
-              <a:t>Financing scenarios</a:t>
-            </a:r>
-            <a:br>
-              <a:rPr lang="en-US" noProof="1"/>
-            </a:br>
-            <a:r>
-              <a:rPr lang="en-US" noProof="1"/>
-              <a:t>Concrete financing scenarios integrated with locally available subsidies</a:t>
-            </a:r>
-          </a:p>
-        </p:txBody>
-      </p:sp>
-      <p:sp>
-        <p:nvSpPr>
-          <p:cNvPr id="12" name="Date Placeholder 11">
-            <a:extLst>
-              <a:ext uri="{FF2B5EF4-FFF2-40B4-BE49-F238E27FC236}">
-                <a16:creationId xmlns:a16="http://schemas.microsoft.com/office/drawing/2014/main" id="{5909F2DC-F097-42AB-88E7-0CA09BD5E2C2}"/>
-              </a:ext>
-            </a:extLst>
-          </p:cNvPr>
-          <p:cNvSpPr>
-            <a:spLocks noGrp="1"/>
-          </p:cNvSpPr>
-          <p:nvPr>
-            <p:ph type="dt" sz="half" idx="10"/>
-          </p:nvPr>
-        </p:nvSpPr>
-        <p:spPr>
-          <a:xfrm>
-            <a:off x="838200" y="6356350"/>
-            <a:ext cx="2743200" cy="365125"/>
-          </a:xfrm>
-        </p:spPr>
-        <p:txBody>
-          <a:bodyPr/>
-          <a:lstStyle/>
-          <a:p>
-            <a:r>
-              <a:rPr lang="en-US" dirty="0"/>
-              <a:t>2026</a:t>
-            </a:r>
-          </a:p>
-        </p:txBody>
-      </p:sp>
-      <p:sp>
-        <p:nvSpPr>
-          <p:cNvPr id="13" name="Footer Placeholder 12">
-            <a:extLst>
-              <a:ext uri="{FF2B5EF4-FFF2-40B4-BE49-F238E27FC236}">
-                <a16:creationId xmlns:a16="http://schemas.microsoft.com/office/drawing/2014/main" id="{F4A37AA9-0BEE-42AC-8CC0-AE5B8663553A}"/>
-              </a:ext>
-            </a:extLst>
-          </p:cNvPr>
-          <p:cNvSpPr>
-            <a:spLocks noGrp="1"/>
-          </p:cNvSpPr>
-          <p:nvPr>
-            <p:ph type="ftr" sz="quarter" idx="11"/>
-          </p:nvPr>
-        </p:nvSpPr>
-        <p:spPr>
-          <a:xfrm>
-            <a:off x="4038600" y="6356350"/>
-            <a:ext cx="4114800" cy="365125"/>
-          </a:xfrm>
-        </p:spPr>
-        <p:txBody>
-          <a:bodyPr/>
-          <a:lstStyle/>
-          <a:p>
-            <a:r>
-              <a:rPr lang="en-US" dirty="0"/>
-              <a:t>Pitch Deck</a:t>
-            </a:r>
-          </a:p>
-        </p:txBody>
-      </p:sp>
-      <p:sp>
-        <p:nvSpPr>
-          <p:cNvPr id="14" name="Slide Number Placeholder 13">
-            <a:extLst>
-              <a:ext uri="{FF2B5EF4-FFF2-40B4-BE49-F238E27FC236}">
-                <a16:creationId xmlns:a16="http://schemas.microsoft.com/office/drawing/2014/main" id="{42152A75-1CD2-44EC-9374-C83D4604A5DD}"/>
-              </a:ext>
-            </a:extLst>
-          </p:cNvPr>
-          <p:cNvSpPr>
-            <a:spLocks noGrp="1"/>
-          </p:cNvSpPr>
-          <p:nvPr>
-            <p:ph type="sldNum" sz="quarter" idx="12"/>
-          </p:nvPr>
-        </p:nvSpPr>
-        <p:spPr>
-          <a:xfrm>
-            <a:off x="8610600" y="6356350"/>
-            <a:ext cx="2743200" cy="365125"/>
-          </a:xfrm>
-        </p:spPr>
-        <p:txBody>
-          <a:bodyPr/>
-          <a:lstStyle/>
-          <a:p>
-            <a:fld id="{B5CEABB6-07DC-46E8-9B57-56EC44A396E5}" type="slidenum">
-              <a:rPr lang="en-US" smtClean="0"/>
-              <a:pPr/>
-              <a:t>7</a:t>
-            </a:fld>
-            <a:endParaRPr lang="en-US" dirty="0"/>
-          </a:p>
-        </p:txBody>
-      </p:sp>
-    </p:spTree>
-    <p:extLst>
-      <p:ext uri="{BB962C8B-B14F-4D97-AF65-F5344CB8AC3E}">
-        <p14:creationId xmlns:p14="http://schemas.microsoft.com/office/powerpoint/2010/main" val="4151694508"/>
-      </p:ext>
-    </p:extLst>
-  </p:cSld>
-  <p:clrMapOvr>
-    <a:masterClrMapping/>
-  </p:clrMapOvr>
-</p:sld>
-</file>
-
-<file path=ppt/slides/slide8.xml><?xml version="1.0" encoding="utf-8"?>
-<p:sld xmlns:a="http://schemas.openxmlformats.org/drawingml/2006/main" xmlns:r="http://schemas.openxmlformats.org/officeDocument/2006/relationships" xmlns:p="http://schemas.openxmlformats.org/presentationml/2006/main">
-  <p:cSld>
-    <p:spTree>
-      <p:nvGrpSpPr>
-        <p:cNvPr id="1" name=""/>
-        <p:cNvGrpSpPr/>
-        <p:nvPr/>
-      </p:nvGrpSpPr>
-      <p:grpSpPr>
-        <a:xfrm>
-          <a:off x="0" y="0"/>
-          <a:ext cx="0" cy="0"/>
-          <a:chOff x="0" y="0"/>
-          <a:chExt cx="0" cy="0"/>
-        </a:xfrm>
-      </p:grpSpPr>
-      <p:sp>
-        <p:nvSpPr>
-          <p:cNvPr id="2" name="Title 1">
-            <a:extLst>
-              <a:ext uri="{FF2B5EF4-FFF2-40B4-BE49-F238E27FC236}">
-                <a16:creationId xmlns:a16="http://schemas.microsoft.com/office/drawing/2014/main" id="{537E1C88-627C-4655-A4FB-0BB02EDB078A}"/>
-              </a:ext>
-            </a:extLst>
-          </p:cNvPr>
-          <p:cNvSpPr>
-            <a:spLocks noGrp="1"/>
-          </p:cNvSpPr>
-          <p:nvPr>
-            <p:ph type="title"/>
-          </p:nvPr>
-        </p:nvSpPr>
-        <p:spPr>
-          <a:xfrm>
-            <a:off x="1362075" y="1671639"/>
-            <a:ext cx="5111750" cy="1204912"/>
-          </a:xfrm>
-        </p:spPr>
-        <p:txBody>
-          <a:bodyPr/>
-          <a:lstStyle/>
-          <a:p>
-            <a:r>
-              <a:rPr lang="en-US" dirty="0"/>
-              <a:t>WHERE WE GO NEXT</a:t>
-            </a:r>
-          </a:p>
-        </p:txBody>
-      </p:sp>
-      <p:sp>
-        <p:nvSpPr>
-          <p:cNvPr id="3" name="Content Placeholder 2">
-            <a:extLst>
-              <a:ext uri="{FF2B5EF4-FFF2-40B4-BE49-F238E27FC236}">
-                <a16:creationId xmlns:a16="http://schemas.microsoft.com/office/drawing/2014/main" id="{033634FE-ADF0-4BC3-A0A9-447EA9DD096B}"/>
-              </a:ext>
-            </a:extLst>
-          </p:cNvPr>
-          <p:cNvSpPr>
-            <a:spLocks noGrp="1"/>
-          </p:cNvSpPr>
-          <p:nvPr>
-            <p:ph type="body" idx="1"/>
-          </p:nvPr>
-        </p:nvSpPr>
-        <p:spPr>
-          <a:xfrm>
-            <a:off x="1362075" y="3100000"/>
-            <a:ext cx="5111750" cy="3100000"/>
-          </a:xfrm>
-        </p:spPr>
-        <p:txBody>
-          <a:bodyPr vert="horz" lIns="91440" tIns="45720" rIns="91440" bIns="45720" rtlCol="0" anchor="t">
-            <a:normAutofit/>
-          </a:bodyPr>
-          <a:lstStyle/>
-          <a:p>
-            <a:r>
-              <a:rPr lang="en-US" b="1" dirty="0">
-                <a:solidFill>
-                  <a:srgbClr val="B85042"/>
-                </a:solidFill>
-              </a:rPr>
-              <a:t>SCHUFA integration</a:t>
-            </a:r>
-          </a:p>
-          <a:p>
-            <a:r>
-              <a:rPr lang="en-US" sz="1600" dirty="0"/>
-              <a:t>Pull credit score to sharpen financing tiers and risk-adjusted pricing.</a:t>
-            </a:r>
-          </a:p>
-          <a:p>
-            <a:r>
-              <a:rPr lang="en-US" b="1" dirty="0">
-                <a:solidFill>
-                  <a:srgbClr val="B85042"/>
-                </a:solidFill>
-              </a:rPr>
-              <a:t>Deeper OSINT</a:t>
-            </a:r>
-          </a:p>
-          <a:p>
-            <a:r>
-              <a:rPr lang="en-US" sz="1600" dirty="0"/>
-              <a:t>Estimate income and obligations to tailor loan sizes and monthly rates.</a:t>
-            </a:r>
-          </a:p>
-          <a:p>
-            <a:r>
-              <a:rPr lang="en-US" b="1" dirty="0">
-                <a:solidFill>
-                  <a:srgbClr val="B85042"/>
-                </a:solidFill>
-              </a:rPr>
-              <a:t>Live adaptive offers</a:t>
-            </a:r>
-          </a:p>
-          <a:p>
-            <a:r>
-              <a:rPr lang="en-US" sz="1600" dirty="0"/>
-              <a:t>Rewrite offers on-the-fly as new info surfaces during the sales call.</a:t>
-            </a:r>
-          </a:p>
-        </p:txBody>
-      </p:sp>
-      <p:sp>
-        <p:nvSpPr>
-          <p:cNvPr id="4" name="Date Placeholder 3">
-            <a:extLst>
-              <a:ext uri="{FF2B5EF4-FFF2-40B4-BE49-F238E27FC236}">
-                <a16:creationId xmlns:a16="http://schemas.microsoft.com/office/drawing/2014/main" id="{5C2ACA2A-6BBE-47CF-B76F-F56C9DBF77E6}"/>
-              </a:ext>
-            </a:extLst>
-          </p:cNvPr>
-          <p:cNvSpPr>
-            <a:spLocks noGrp="1"/>
-          </p:cNvSpPr>
-          <p:nvPr>
-            <p:ph type="dt" sz="half" idx="10"/>
-          </p:nvPr>
-        </p:nvSpPr>
-        <p:spPr>
-          <a:xfrm>
-            <a:off x="838200" y="6356350"/>
-            <a:ext cx="2743200" cy="365125"/>
-          </a:xfrm>
-        </p:spPr>
-        <p:txBody>
-          <a:bodyPr/>
-          <a:lstStyle/>
-          <a:p>
-            <a:r>
-              <a:rPr lang="en-US" dirty="0"/>
-              <a:t>2026</a:t>
-            </a:r>
-          </a:p>
-        </p:txBody>
-      </p:sp>
-      <p:sp>
-        <p:nvSpPr>
-          <p:cNvPr id="5" name="Footer Placeholder 4">
-            <a:extLst>
-              <a:ext uri="{FF2B5EF4-FFF2-40B4-BE49-F238E27FC236}">
-                <a16:creationId xmlns:a16="http://schemas.microsoft.com/office/drawing/2014/main" id="{396A095E-DB05-47EC-A2D5-47398A4A00B4}"/>
-              </a:ext>
-            </a:extLst>
-          </p:cNvPr>
-          <p:cNvSpPr>
-            <a:spLocks noGrp="1"/>
-          </p:cNvSpPr>
-          <p:nvPr>
-            <p:ph type="ftr" sz="quarter" idx="11"/>
-          </p:nvPr>
-        </p:nvSpPr>
-        <p:spPr>
-          <a:xfrm>
-            <a:off x="5224463" y="6356350"/>
-            <a:ext cx="1743075" cy="365125"/>
-          </a:xfrm>
-        </p:spPr>
-        <p:txBody>
-          <a:bodyPr/>
-          <a:lstStyle/>
-          <a:p>
-            <a:r>
-              <a:rPr lang="en-US" dirty="0"/>
-              <a:t>Pitch Deck</a:t>
-            </a:r>
-          </a:p>
-        </p:txBody>
-      </p:sp>
-      <p:sp>
-        <p:nvSpPr>
-          <p:cNvPr id="6" name="Slide Number Placeholder 5">
-            <a:extLst>
-              <a:ext uri="{FF2B5EF4-FFF2-40B4-BE49-F238E27FC236}">
-                <a16:creationId xmlns:a16="http://schemas.microsoft.com/office/drawing/2014/main" id="{C23C3221-5F04-4CA7-A86A-EEA8566A1735}"/>
-              </a:ext>
-            </a:extLst>
-          </p:cNvPr>
-          <p:cNvSpPr>
-            <a:spLocks noGrp="1"/>
-          </p:cNvSpPr>
-          <p:nvPr>
-            <p:ph type="sldNum" sz="quarter" idx="12"/>
-          </p:nvPr>
-        </p:nvSpPr>
-        <p:spPr>
-          <a:xfrm>
-            <a:off x="8610600" y="6356350"/>
-            <a:ext cx="2743200" cy="365125"/>
-          </a:xfrm>
-        </p:spPr>
-        <p:txBody>
-          <a:bodyPr/>
-          <a:lstStyle/>
-          <a:p>
-            <a:fld id="{B5CEABB6-07DC-46E8-9B57-56EC44A396E5}" type="slidenum">
-              <a:rPr lang="en-US" smtClean="0"/>
-              <a:pPr/>
-              <a:t>8</a:t>
-            </a:fld>
-            <a:endParaRPr lang="en-US" dirty="0"/>
-          </a:p>
-        </p:txBody>
-      </p:sp>
-    </p:spTree>
-    <p:extLst>
-      <p:ext uri="{BB962C8B-B14F-4D97-AF65-F5344CB8AC3E}">
-        <p14:creationId xmlns:p14="http://schemas.microsoft.com/office/powerpoint/2010/main" val="1346372204"/>
-      </p:ext>
-    </p:extLst>
-  </p:cSld>
-  <p:clrMapOvr>
-    <a:masterClrMapping/>
-  </p:clrMapOvr>
-</p:sld>
-</file>
-
 <file path=ppt/slides/slide9.xml><?xml version="1.0" encoding="utf-8"?>
 <p:sld xmlns:a="http://schemas.openxmlformats.org/drawingml/2006/main" xmlns:r="http://schemas.openxmlformats.org/officeDocument/2006/relationships" xmlns:p="http://schemas.openxmlformats.org/presentationml/2006/main">
   <p:cSld>
@@ -20305,10 +20680,10 @@
       </p:grpSpPr>
       <p:sp>
         <p:nvSpPr>
-          <p:cNvPr id="2" name="Title 1">
-            <a:extLst>
-              <a:ext uri="{FF2B5EF4-FFF2-40B4-BE49-F238E27FC236}">
-                <a16:creationId xmlns:a16="http://schemas.microsoft.com/office/drawing/2014/main" id="{8A4E0A63-A388-49B1-A04E-27CE9BD622EF}"/>
+          <p:cNvPr id="4" name="Title 3">
+            <a:extLst>
+              <a:ext uri="{FF2B5EF4-FFF2-40B4-BE49-F238E27FC236}">
+                <a16:creationId xmlns:a16="http://schemas.microsoft.com/office/drawing/2014/main" id="{FAD2AE59-5630-4D5C-83A9-4CDEF4D7DCFB}"/>
               </a:ext>
             </a:extLst>
           </p:cNvPr>
@@ -20321,8 +20696,8 @@
         </p:nvSpPr>
         <p:spPr>
           <a:xfrm>
-            <a:off x="669152" y="1152771"/>
-            <a:ext cx="5431971" cy="846301"/>
+            <a:off x="2933700" y="892177"/>
+            <a:ext cx="8421688" cy="1325563"/>
           </a:xfrm>
         </p:spPr>
         <p:txBody>
@@ -20331,42 +20706,108 @@
           <a:p>
             <a:r>
               <a:rPr lang="en-US" dirty="0"/>
-              <a:t>TRY David OUT NOW</a:t>
-            </a:r>
-          </a:p>
-        </p:txBody>
-      </p:sp>
-      <p:sp>
-        <p:nvSpPr>
-          <p:cNvPr id="6" name="Text Placeholder 5">
-            <a:extLst>
-              <a:ext uri="{FF2B5EF4-FFF2-40B4-BE49-F238E27FC236}">
-                <a16:creationId xmlns:a16="http://schemas.microsoft.com/office/drawing/2014/main" id="{7640DF9D-0C9E-4C5D-9635-6B4DE10CCEE5}"/>
-              </a:ext>
-            </a:extLst>
-          </p:cNvPr>
-          <p:cNvSpPr>
-            <a:spLocks noGrp="1"/>
-          </p:cNvSpPr>
-          <p:nvPr>
-            <p:ph type="body" sz="quarter" idx="13"/>
-          </p:nvPr>
-        </p:nvSpPr>
-        <p:spPr>
-          <a:xfrm>
-            <a:off x="671237" y="2469515"/>
-            <a:ext cx="5433204" cy="365125"/>
+              <a:t>CHALLENGE VS. OUR BUILD</a:t>
+            </a:r>
+          </a:p>
+        </p:txBody>
+      </p:sp>
+      <p:sp>
+        <p:nvSpPr>
+          <p:cNvPr id="5" name="Text Placeholder 4">
+            <a:extLst>
+              <a:ext uri="{FF2B5EF4-FFF2-40B4-BE49-F238E27FC236}">
+                <a16:creationId xmlns:a16="http://schemas.microsoft.com/office/drawing/2014/main" id="{F8657664-A458-4DDD-ACC2-1D87FCD6FCA9}"/>
+              </a:ext>
+            </a:extLst>
+          </p:cNvPr>
+          <p:cNvSpPr>
+            <a:spLocks noGrp="1"/>
+          </p:cNvSpPr>
+          <p:nvPr>
+            <p:ph type="body" idx="1"/>
+          </p:nvPr>
+        </p:nvSpPr>
+        <p:spPr>
+          <a:xfrm>
+            <a:off x="2933700" y="2776936"/>
+            <a:ext cx="3924300" cy="823912"/>
+          </a:xfrm>
+        </p:spPr>
+        <p:txBody>
+          <a:bodyPr/>
+          <a:lstStyle/>
+          <a:p>
+            <a:r>
+              <a:rPr lang="en-US" dirty="0"/>
+              <a:t>CHALLENGE PILLARS</a:t>
+            </a:r>
+          </a:p>
+        </p:txBody>
+      </p:sp>
+      <p:sp>
+        <p:nvSpPr>
+          <p:cNvPr id="6" name="Content Placeholder 5">
+            <a:extLst>
+              <a:ext uri="{FF2B5EF4-FFF2-40B4-BE49-F238E27FC236}">
+                <a16:creationId xmlns:a16="http://schemas.microsoft.com/office/drawing/2014/main" id="{5A6B31B0-7B84-475D-961F-09C0191F91A2}"/>
+              </a:ext>
+            </a:extLst>
+          </p:cNvPr>
+          <p:cNvSpPr>
+            <a:spLocks noGrp="1"/>
+          </p:cNvSpPr>
+          <p:nvPr>
+            <p:ph sz="half" idx="2"/>
+          </p:nvPr>
+        </p:nvSpPr>
+        <p:spPr>
+          <a:xfrm>
+            <a:off x="2933700" y="3834606"/>
+            <a:ext cx="3924300" cy="1997867"/>
           </a:xfrm>
         </p:spPr>
         <p:txBody>
           <a:bodyPr vert="horz" lIns="91440" tIns="45720" rIns="91440" bIns="45720" rtlCol="0" anchor="t">
-            <a:noAutofit/>
+            <a:normAutofit fontScale="92500" lnSpcReduction="10000"/>
           </a:bodyPr>
           <a:lstStyle/>
           <a:p>
             <a:r>
+              <a:rPr lang="en-US" b="1" noProof="1"/>
+              <a:t>Market &amp; regulatory context</a:t>
+            </a:r>
+            <a:br>
               <a:rPr lang="en-US" noProof="1"/>
-              <a:t>LIVE AT</a:t>
+            </a:br>
+            <a:r>
+              <a:rPr lang="en-US" noProof="1"/>
+              <a:t>Energy price trends, carbon pricing, subsidies, regulations, why now</a:t>
+            </a:r>
+          </a:p>
+          <a:p>
+            <a:r>
+              <a:rPr lang="en-US" b="1" noProof="1"/>
+              <a:t>Compelling offer</a:t>
+            </a:r>
+            <a:br>
+              <a:rPr lang="en-US" noProof="1"/>
+            </a:br>
+            <a:r>
+              <a:rPr lang="en-US" noProof="1"/>
+              <a:t>2–3 personalised packages at different levels of ambition with justifications</a:t>
+            </a:r>
+          </a:p>
+          <a:p>
+            <a:r>
+              <a:rPr lang="en-US" b="1" noProof="1"/>
+              <a:t>Financing strategy</a:t>
+            </a:r>
+            <a:br>
+              <a:rPr lang="en-US" noProof="1"/>
+            </a:br>
+            <a:r>
+              <a:rPr lang="en-US" noProof="1"/>
+              <a:t>Cash, partial financing, full financing scenarios with subsidies integrated</a:t>
             </a:r>
           </a:p>
         </p:txBody>
@@ -20376,165 +20817,122 @@
           <p:cNvPr id="7" name="Text Placeholder 6">
             <a:extLst>
               <a:ext uri="{FF2B5EF4-FFF2-40B4-BE49-F238E27FC236}">
-                <a16:creationId xmlns:a16="http://schemas.microsoft.com/office/drawing/2014/main" id="{40297407-CE4E-4284-879D-AEC395713625}"/>
-              </a:ext>
-            </a:extLst>
-          </p:cNvPr>
-          <p:cNvSpPr>
-            <a:spLocks noGrp="1"/>
-          </p:cNvSpPr>
-          <p:nvPr>
-            <p:ph type="body" sz="quarter" idx="15"/>
-          </p:nvPr>
-        </p:nvSpPr>
-        <p:spPr>
-          <a:xfrm>
-            <a:off x="670811" y="2798940"/>
-            <a:ext cx="5431971" cy="557950"/>
+                <a16:creationId xmlns:a16="http://schemas.microsoft.com/office/drawing/2014/main" id="{578017FE-712E-4E95-B483-B700F1AA4B2A}"/>
+              </a:ext>
+            </a:extLst>
+          </p:cNvPr>
+          <p:cNvSpPr>
+            <a:spLocks noGrp="1"/>
+          </p:cNvSpPr>
+          <p:nvPr>
+            <p:ph type="body" sz="quarter" idx="3"/>
+          </p:nvPr>
+        </p:nvSpPr>
+        <p:spPr>
+          <a:xfrm>
+            <a:off x="7410173" y="2776936"/>
+            <a:ext cx="3943627" cy="823912"/>
+          </a:xfrm>
+        </p:spPr>
+        <p:txBody>
+          <a:bodyPr/>
+          <a:lstStyle/>
+          <a:p>
+            <a:r>
+              <a:rPr lang="en-US" dirty="0"/>
+              <a:t>WHAT WE BUILT</a:t>
+            </a:r>
+          </a:p>
+        </p:txBody>
+      </p:sp>
+      <p:sp>
+        <p:nvSpPr>
+          <p:cNvPr id="11" name="Content Placeholder 10">
+            <a:extLst>
+              <a:ext uri="{FF2B5EF4-FFF2-40B4-BE49-F238E27FC236}">
+                <a16:creationId xmlns:a16="http://schemas.microsoft.com/office/drawing/2014/main" id="{D0E0ACA0-9139-4C37-920D-BF3C1FF461C1}"/>
+              </a:ext>
+            </a:extLst>
+          </p:cNvPr>
+          <p:cNvSpPr>
+            <a:spLocks noGrp="1"/>
+          </p:cNvSpPr>
+          <p:nvPr>
+            <p:ph sz="quarter" idx="4"/>
+          </p:nvPr>
+        </p:nvSpPr>
+        <p:spPr>
+          <a:xfrm>
+            <a:off x="7410173" y="3834606"/>
+            <a:ext cx="3943627" cy="1997867"/>
           </a:xfrm>
         </p:spPr>
         <p:txBody>
           <a:bodyPr>
-            <a:normAutofit lnSpcReduction="10000"/>
+            <a:normAutofit fontScale="92500" lnSpcReduction="10000"/>
           </a:bodyPr>
           <a:lstStyle/>
           <a:p>
             <a:r>
-              <a:rPr lang="en-US" sz="3200" b="1" noProof="1">
-                <a:solidFill>
-                  <a:srgbClr val="B85042"/>
-                </a:solidFill>
-              </a:rPr>
-              <a:t>qhack.mehdy.eu</a:t>
-            </a:r>
-          </a:p>
-        </p:txBody>
-      </p:sp>
-      <p:sp>
-        <p:nvSpPr>
-          <p:cNvPr id="8" name="Text Placeholder 7">
-            <a:extLst>
-              <a:ext uri="{FF2B5EF4-FFF2-40B4-BE49-F238E27FC236}">
-                <a16:creationId xmlns:a16="http://schemas.microsoft.com/office/drawing/2014/main" id="{F5C3A7BE-F7FC-4942-A31A-491A8A806103}"/>
-              </a:ext>
-            </a:extLst>
-          </p:cNvPr>
-          <p:cNvSpPr>
-            <a:spLocks noGrp="1"/>
-          </p:cNvSpPr>
-          <p:nvPr>
-            <p:ph type="body" sz="quarter" idx="23"/>
-          </p:nvPr>
-        </p:nvSpPr>
-        <p:spPr>
-          <a:xfrm>
-            <a:off x="671237" y="3569311"/>
-            <a:ext cx="5433204" cy="365125"/>
-          </a:xfrm>
-        </p:spPr>
-        <p:txBody>
-          <a:bodyPr vert="horz" lIns="91440" tIns="45720" rIns="91440" bIns="45720" rtlCol="0" anchor="t">
-            <a:noAutofit/>
-          </a:bodyPr>
-          <a:lstStyle/>
-          <a:p>
-            <a:r>
+              <a:rPr lang="en-US" b="1" noProof="1"/>
+              <a:t>Sourcing via orchestrated agents</a:t>
+            </a:r>
+            <a:br>
               <a:rPr lang="en-US" noProof="1"/>
-              <a:t>BUILT WITH</a:t>
-            </a:r>
-          </a:p>
-        </p:txBody>
-      </p:sp>
-      <p:sp>
-        <p:nvSpPr>
-          <p:cNvPr id="9" name="Text Placeholder 8">
-            <a:extLst>
-              <a:ext uri="{FF2B5EF4-FFF2-40B4-BE49-F238E27FC236}">
-                <a16:creationId xmlns:a16="http://schemas.microsoft.com/office/drawing/2014/main" id="{95CCE699-03D1-4642-B46A-B14EF17DA183}"/>
-              </a:ext>
-            </a:extLst>
-          </p:cNvPr>
-          <p:cNvSpPr>
-            <a:spLocks noGrp="1"/>
-          </p:cNvSpPr>
-          <p:nvPr>
-            <p:ph type="body" sz="quarter" idx="24"/>
-          </p:nvPr>
-        </p:nvSpPr>
-        <p:spPr>
-          <a:xfrm>
-            <a:off x="670811" y="3898736"/>
-            <a:ext cx="5431971" cy="557950"/>
-          </a:xfrm>
-        </p:spPr>
-        <p:txBody>
-          <a:bodyPr>
-            <a:normAutofit/>
-          </a:bodyPr>
-          <a:lstStyle/>
-          <a:p>
+            </a:br>
             <a:r>
               <a:rPr lang="en-US" noProof="1"/>
-              <a:t>Next.js + FastAPI  •  Google Cloud APIs  •  Claude</a:t>
-            </a:r>
-          </a:p>
-        </p:txBody>
-      </p:sp>
-      <p:sp>
-        <p:nvSpPr>
-          <p:cNvPr id="10" name="Text Placeholder 9">
-            <a:extLst>
-              <a:ext uri="{FF2B5EF4-FFF2-40B4-BE49-F238E27FC236}">
-                <a16:creationId xmlns:a16="http://schemas.microsoft.com/office/drawing/2014/main" id="{BC1DF189-6F2F-4C21-88CC-C82D3D0D147B}"/>
-              </a:ext>
-            </a:extLst>
-          </p:cNvPr>
-          <p:cNvSpPr>
-            <a:spLocks noGrp="1"/>
-          </p:cNvSpPr>
-          <p:nvPr>
-            <p:ph type="body" sz="quarter" idx="25"/>
-          </p:nvPr>
-        </p:nvSpPr>
-        <p:spPr>
-          <a:xfrm>
-            <a:off x="669152" y="4486544"/>
-            <a:ext cx="3112422" cy="365125"/>
-          </a:xfrm>
-        </p:spPr>
-        <p:txBody>
-          <a:bodyPr vert="horz" lIns="91440" tIns="45720" rIns="91440" bIns="45720" rtlCol="0" anchor="t">
-            <a:normAutofit lnSpcReduction="10000"/>
-          </a:bodyPr>
-          <a:lstStyle/>
-          <a:p>
-            <a:r>
+              <a:t>7 parallel agents: roof, solar, energy, subsidies, OSINT, market.</a:t>
+            </a:r>
+          </a:p>
+          <a:p>
+            <a:r>
+              <a:rPr lang="en-US" b="1" noProof="1"/>
+              <a:t>3 offer tiers + pitch assistant</a:t>
+            </a:r>
+            <a:br>
               <a:rPr lang="en-US" noProof="1"/>
-              <a:t>Hosted with &lt;3</a:t>
-            </a:r>
-          </a:p>
-        </p:txBody>
-      </p:sp>
-      <p:sp>
-        <p:nvSpPr>
-          <p:cNvPr id="32" name="Date Placeholder 31">
-            <a:extLst>
-              <a:ext uri="{FF2B5EF4-FFF2-40B4-BE49-F238E27FC236}">
-                <a16:creationId xmlns:a16="http://schemas.microsoft.com/office/drawing/2014/main" id="{D5DB19F8-B538-4965-BA90-ED372B99F5DC}"/>
-              </a:ext>
-            </a:extLst>
-          </p:cNvPr>
-          <p:cNvSpPr>
-            <a:spLocks noGrp="1"/>
-          </p:cNvSpPr>
-          <p:nvPr>
-            <p:ph type="dt" sz="half" idx="20"/>
-          </p:nvPr>
-        </p:nvSpPr>
-        <p:spPr>
-          <a:xfrm>
-            <a:off x="5919680" y="6356350"/>
-            <a:ext cx="947516" cy="365125"/>
+            </a:br>
+            <a:r>
+              <a:rPr lang="en-US" noProof="1"/>
+              <a:t>Good / Better / Best with cash, loan and lease scenarios and concrete advice for sales pitch</a:t>
+            </a:r>
+          </a:p>
+          <a:p>
+            <a:r>
+              <a:rPr lang="en-US" b="1" noProof="1"/>
+              <a:t>Financing scenarios</a:t>
+            </a:r>
+            <a:br>
+              <a:rPr lang="en-US" noProof="1"/>
+            </a:br>
+            <a:r>
+              <a:rPr lang="en-US" noProof="1"/>
+              <a:t>Concrete financing scenarios integrated with locally available subsidies</a:t>
+            </a:r>
+          </a:p>
+        </p:txBody>
+      </p:sp>
+      <p:sp>
+        <p:nvSpPr>
+          <p:cNvPr id="12" name="Date Placeholder 11">
+            <a:extLst>
+              <a:ext uri="{FF2B5EF4-FFF2-40B4-BE49-F238E27FC236}">
+                <a16:creationId xmlns:a16="http://schemas.microsoft.com/office/drawing/2014/main" id="{5909F2DC-F097-42AB-88E7-0CA09BD5E2C2}"/>
+              </a:ext>
+            </a:extLst>
+          </p:cNvPr>
+          <p:cNvSpPr>
+            <a:spLocks noGrp="1"/>
+          </p:cNvSpPr>
+          <p:nvPr>
+            <p:ph type="dt" sz="half" idx="10"/>
+          </p:nvPr>
+        </p:nvSpPr>
+        <p:spPr>
+          <a:xfrm>
+            <a:off x="838200" y="6356350"/>
+            <a:ext cx="2743200" cy="365125"/>
           </a:xfrm>
         </p:spPr>
         <p:txBody>
@@ -20550,24 +20948,24 @@
       </p:sp>
       <p:sp>
         <p:nvSpPr>
-          <p:cNvPr id="3" name="Footer Placeholder 2">
-            <a:extLst>
-              <a:ext uri="{FF2B5EF4-FFF2-40B4-BE49-F238E27FC236}">
-                <a16:creationId xmlns:a16="http://schemas.microsoft.com/office/drawing/2014/main" id="{005C44B1-BA82-483C-BD91-F89067442F9E}"/>
-              </a:ext>
-            </a:extLst>
-          </p:cNvPr>
-          <p:cNvSpPr>
-            <a:spLocks noGrp="1"/>
-          </p:cNvSpPr>
-          <p:nvPr>
-            <p:ph type="ftr" sz="quarter" idx="21"/>
-          </p:nvPr>
-        </p:nvSpPr>
-        <p:spPr>
-          <a:xfrm>
-            <a:off x="7161955" y="6356350"/>
-            <a:ext cx="3243942" cy="365125"/>
+          <p:cNvPr id="13" name="Footer Placeholder 12">
+            <a:extLst>
+              <a:ext uri="{FF2B5EF4-FFF2-40B4-BE49-F238E27FC236}">
+                <a16:creationId xmlns:a16="http://schemas.microsoft.com/office/drawing/2014/main" id="{F4A37AA9-0BEE-42AC-8CC0-AE5B8663553A}"/>
+              </a:ext>
+            </a:extLst>
+          </p:cNvPr>
+          <p:cNvSpPr>
+            <a:spLocks noGrp="1"/>
+          </p:cNvSpPr>
+          <p:nvPr>
+            <p:ph type="ftr" sz="quarter" idx="11"/>
+          </p:nvPr>
+        </p:nvSpPr>
+        <p:spPr>
+          <a:xfrm>
+            <a:off x="4038600" y="6356350"/>
+            <a:ext cx="4114800" cy="365125"/>
           </a:xfrm>
         </p:spPr>
         <p:txBody>
@@ -20583,31 +20981,31 @@
       </p:sp>
       <p:sp>
         <p:nvSpPr>
-          <p:cNvPr id="4" name="Slide Number Placeholder 3">
-            <a:extLst>
-              <a:ext uri="{FF2B5EF4-FFF2-40B4-BE49-F238E27FC236}">
-                <a16:creationId xmlns:a16="http://schemas.microsoft.com/office/drawing/2014/main" id="{79ED4A67-3A46-4F54-A12A-EAE1B53E6457}"/>
-              </a:ext>
-            </a:extLst>
-          </p:cNvPr>
-          <p:cNvSpPr>
-            <a:spLocks noGrp="1"/>
-          </p:cNvSpPr>
-          <p:nvPr>
-            <p:ph type="sldNum" sz="quarter" idx="22"/>
-          </p:nvPr>
-        </p:nvSpPr>
-        <p:spPr>
-          <a:xfrm>
-            <a:off x="10700656" y="6356350"/>
-            <a:ext cx="653143" cy="365125"/>
+          <p:cNvPr id="14" name="Slide Number Placeholder 13">
+            <a:extLst>
+              <a:ext uri="{FF2B5EF4-FFF2-40B4-BE49-F238E27FC236}">
+                <a16:creationId xmlns:a16="http://schemas.microsoft.com/office/drawing/2014/main" id="{42152A75-1CD2-44EC-9374-C83D4604A5DD}"/>
+              </a:ext>
+            </a:extLst>
+          </p:cNvPr>
+          <p:cNvSpPr>
+            <a:spLocks noGrp="1"/>
+          </p:cNvSpPr>
+          <p:nvPr>
+            <p:ph type="sldNum" sz="quarter" idx="12"/>
+          </p:nvPr>
+        </p:nvSpPr>
+        <p:spPr>
+          <a:xfrm>
+            <a:off x="8610600" y="6356350"/>
+            <a:ext cx="2743200" cy="365125"/>
           </a:xfrm>
         </p:spPr>
         <p:txBody>
           <a:bodyPr/>
           <a:lstStyle/>
           <a:p>
-            <a:fld id="{19B51A1E-902D-48AF-9020-955120F399B6}" type="slidenum">
+            <a:fld id="{B5CEABB6-07DC-46E8-9B57-56EC44A396E5}" type="slidenum">
               <a:rPr lang="en-US" smtClean="0"/>
               <a:pPr/>
               <a:t>9</a:t>
@@ -20616,71 +21014,10 @@
           </a:p>
         </p:txBody>
       </p:sp>
-      <p:pic>
-        <p:nvPicPr>
-          <p:cNvPr id="16" name="Picture 15">
-            <a:extLst>
-              <a:ext uri="{FF2B5EF4-FFF2-40B4-BE49-F238E27FC236}">
-                <a16:creationId xmlns:a16="http://schemas.microsoft.com/office/drawing/2014/main" id="{595A97EE-6711-1DC7-846A-AE3EF410398C}"/>
-              </a:ext>
-            </a:extLst>
-          </p:cNvPr>
-          <p:cNvPicPr>
-            <a:picLocks noChangeAspect="1"/>
-          </p:cNvPicPr>
-          <p:nvPr/>
-        </p:nvPicPr>
-        <p:blipFill>
-          <a:blip r:embed="rId2"/>
-          <a:srcRect l="2749" t="22970" b="31916"/>
-          <a:stretch>
-            <a:fillRect/>
-          </a:stretch>
-        </p:blipFill>
-        <p:spPr>
-          <a:xfrm>
-            <a:off x="759684" y="4851669"/>
-            <a:ext cx="1859078" cy="1533122"/>
-          </a:xfrm>
-          <a:prstGeom prst="rect">
-            <a:avLst/>
-          </a:prstGeom>
-        </p:spPr>
-      </p:pic>
-      <p:pic>
-        <p:nvPicPr>
-          <p:cNvPr id="18" name="Picture 17">
-            <a:extLst>
-              <a:ext uri="{FF2B5EF4-FFF2-40B4-BE49-F238E27FC236}">
-                <a16:creationId xmlns:a16="http://schemas.microsoft.com/office/drawing/2014/main" id="{569C4708-DC6A-A26C-02D6-BABD852A30F8}"/>
-              </a:ext>
-            </a:extLst>
-          </p:cNvPr>
-          <p:cNvPicPr>
-            <a:picLocks noChangeAspect="1"/>
-          </p:cNvPicPr>
-          <p:nvPr/>
-        </p:nvPicPr>
-        <p:blipFill>
-          <a:blip r:embed="rId3"/>
-          <a:stretch>
-            <a:fillRect/>
-          </a:stretch>
-        </p:blipFill>
-        <p:spPr>
-          <a:xfrm>
-            <a:off x="6096000" y="801231"/>
-            <a:ext cx="5255537" cy="5255537"/>
-          </a:xfrm>
-          <a:prstGeom prst="rect">
-            <a:avLst/>
-          </a:prstGeom>
-        </p:spPr>
-      </p:pic>
     </p:spTree>
     <p:extLst>
       <p:ext uri="{BB962C8B-B14F-4D97-AF65-F5344CB8AC3E}">
-        <p14:creationId xmlns:p14="http://schemas.microsoft.com/office/powerpoint/2010/main" val="2069393026"/>
+        <p14:creationId xmlns:p14="http://schemas.microsoft.com/office/powerpoint/2010/main" val="4151694508"/>
       </p:ext>
     </p:extLst>
   </p:cSld>
@@ -21482,26 +21819,6 @@
 </file>
 
 <file path=customXml/item1.xml><?xml version="1.0" encoding="utf-8"?>
-<p:properties xmlns:p="http://schemas.microsoft.com/office/2006/metadata/properties" xmlns:xsi="http://www.w3.org/2001/XMLSchema-instance" xmlns:pc="http://schemas.microsoft.com/office/infopath/2007/PartnerControls">
-  <documentManagement>
-    <_ip_UnifiedCompliancePolicyUIAction xmlns="http://schemas.microsoft.com/sharepoint/v3" xsi:nil="true"/>
-    <Image xmlns="71af3243-3dd4-4a8d-8c0d-dd76da1f02a5">
-      <Url xsi:nil="true"/>
-      <Description xsi:nil="true"/>
-    </Image>
-    <Status xmlns="71af3243-3dd4-4a8d-8c0d-dd76da1f02a5">Not started</Status>
-    <Background xmlns="71af3243-3dd4-4a8d-8c0d-dd76da1f02a5">false</Background>
-    <_ip_UnifiedCompliancePolicyProperties xmlns="http://schemas.microsoft.com/sharepoint/v3" xsi:nil="true"/>
-    <ImageTagsTaxHTField xmlns="71af3243-3dd4-4a8d-8c0d-dd76da1f02a5">
-      <Terms xmlns="http://schemas.microsoft.com/office/infopath/2007/PartnerControls"/>
-    </ImageTagsTaxHTField>
-    <TaxCatchAll xmlns="230e9df3-be65-4c73-a93b-d1236ebd677e" xsi:nil="true"/>
-    <MediaServiceKeyPoints xmlns="71af3243-3dd4-4a8d-8c0d-dd76da1f02a5" xsi:nil="true"/>
-  </documentManagement>
-</p:properties>
-</file>
-
-<file path=customXml/item2.xml><?xml version="1.0" encoding="utf-8"?>
 <?mso-contentType ?>
 <FormTemplates xmlns="http://schemas.microsoft.com/sharepoint/v3/contenttype/forms">
   <Display>DocumentLibraryForm</Display>
@@ -21510,7 +21827,7 @@
 </FormTemplates>
 </file>
 
-<file path=customXml/item3.xml><?xml version="1.0" encoding="utf-8"?>
+<file path=customXml/item2.xml><?xml version="1.0" encoding="utf-8"?>
 <ct:contentTypeSchema xmlns:ct="http://schemas.microsoft.com/office/2006/metadata/contentType" xmlns:ma="http://schemas.microsoft.com/office/2006/metadata/properties/metaAttributes" ct:_="" ma:_="" ma:contentTypeName="Document" ma:contentTypeID="0x01010079F111ED35F8CC479449609E8A0923A6" ma:contentTypeVersion="27" ma:contentTypeDescription="Create a new document." ma:contentTypeScope="" ma:versionID="c6f9a84f66a9c8b9a21755b9ffafb945">
   <xsd:schema xmlns:xsd="http://www.w3.org/2001/XMLSchema" xmlns:xs="http://www.w3.org/2001/XMLSchema" xmlns:p="http://schemas.microsoft.com/office/2006/metadata/properties" xmlns:ns1="http://schemas.microsoft.com/sharepoint/v3" xmlns:ns2="71af3243-3dd4-4a8d-8c0d-dd76da1f02a5" xmlns:ns3="16c05727-aa75-4e4a-9b5f-8a80a1165891" xmlns:ns4="230e9df3-be65-4c73-a93b-d1236ebd677e" targetNamespace="http://schemas.microsoft.com/office/2006/metadata/properties" ma:root="true" ma:fieldsID="27df39e3e7036dff54f89ddd5805ce72" ns1:_="" ns2:_="" ns3:_="" ns4:_="">
     <xsd:import namespace="http://schemas.microsoft.com/sharepoint/v3"/>
@@ -21816,19 +22133,27 @@
 </ct:contentTypeSchema>
 </file>
 
-<file path=customXml/itemProps1.xml><?xml version="1.0" encoding="utf-8"?>
-<ds:datastoreItem xmlns:ds="http://schemas.openxmlformats.org/officeDocument/2006/customXml" ds:itemID="{BEFFFA3F-0FB5-4ED3-8906-A15B16577F44}">
-  <ds:schemaRefs>
-    <ds:schemaRef ds:uri="http://schemas.microsoft.com/office/2006/metadata/properties"/>
-    <ds:schemaRef ds:uri="http://schemas.microsoft.com/office/infopath/2007/PartnerControls"/>
-    <ds:schemaRef ds:uri="http://schemas.microsoft.com/sharepoint/v3"/>
-    <ds:schemaRef ds:uri="71af3243-3dd4-4a8d-8c0d-dd76da1f02a5"/>
-    <ds:schemaRef ds:uri="230e9df3-be65-4c73-a93b-d1236ebd677e"/>
-  </ds:schemaRefs>
-</ds:datastoreItem>
+<file path=customXml/item3.xml><?xml version="1.0" encoding="utf-8"?>
+<p:properties xmlns:p="http://schemas.microsoft.com/office/2006/metadata/properties" xmlns:xsi="http://www.w3.org/2001/XMLSchema-instance" xmlns:pc="http://schemas.microsoft.com/office/infopath/2007/PartnerControls">
+  <documentManagement>
+    <_ip_UnifiedCompliancePolicyUIAction xmlns="http://schemas.microsoft.com/sharepoint/v3" xsi:nil="true"/>
+    <Image xmlns="71af3243-3dd4-4a8d-8c0d-dd76da1f02a5">
+      <Url xsi:nil="true"/>
+      <Description xsi:nil="true"/>
+    </Image>
+    <Status xmlns="71af3243-3dd4-4a8d-8c0d-dd76da1f02a5">Not started</Status>
+    <Background xmlns="71af3243-3dd4-4a8d-8c0d-dd76da1f02a5">false</Background>
+    <_ip_UnifiedCompliancePolicyProperties xmlns="http://schemas.microsoft.com/sharepoint/v3" xsi:nil="true"/>
+    <ImageTagsTaxHTField xmlns="71af3243-3dd4-4a8d-8c0d-dd76da1f02a5">
+      <Terms xmlns="http://schemas.microsoft.com/office/infopath/2007/PartnerControls"/>
+    </ImageTagsTaxHTField>
+    <TaxCatchAll xmlns="230e9df3-be65-4c73-a93b-d1236ebd677e" xsi:nil="true"/>
+    <MediaServiceKeyPoints xmlns="71af3243-3dd4-4a8d-8c0d-dd76da1f02a5" xsi:nil="true"/>
+  </documentManagement>
+</p:properties>
 </file>
 
-<file path=customXml/itemProps2.xml><?xml version="1.0" encoding="utf-8"?>
+<file path=customXml/itemProps1.xml><?xml version="1.0" encoding="utf-8"?>
 <ds:datastoreItem xmlns:ds="http://schemas.openxmlformats.org/officeDocument/2006/customXml" ds:itemID="{6966C46A-DC57-4209-80CD-9FE6C93151FF}">
   <ds:schemaRefs>
     <ds:schemaRef ds:uri="http://schemas.microsoft.com/sharepoint/v3/contenttype/forms"/>
@@ -21836,7 +22161,7 @@
 </ds:datastoreItem>
 </file>
 
-<file path=customXml/itemProps3.xml><?xml version="1.0" encoding="utf-8"?>
+<file path=customXml/itemProps2.xml><?xml version="1.0" encoding="utf-8"?>
 <ds:datastoreItem xmlns:ds="http://schemas.openxmlformats.org/officeDocument/2006/customXml" ds:itemID="{4E18436D-DA32-4E27-AC64-8FFEDA5218F9}">
   <ds:schemaRefs>
     <ds:schemaRef ds:uri="http://schemas.microsoft.com/office/2006/metadata/contentType"/>
@@ -21857,6 +22182,18 @@
 </ds:datastoreItem>
 </file>
 
+<file path=customXml/itemProps3.xml><?xml version="1.0" encoding="utf-8"?>
+<ds:datastoreItem xmlns:ds="http://schemas.openxmlformats.org/officeDocument/2006/customXml" ds:itemID="{BEFFFA3F-0FB5-4ED3-8906-A15B16577F44}">
+  <ds:schemaRefs>
+    <ds:schemaRef ds:uri="http://schemas.microsoft.com/office/2006/metadata/properties"/>
+    <ds:schemaRef ds:uri="http://schemas.microsoft.com/office/infopath/2007/PartnerControls"/>
+    <ds:schemaRef ds:uri="http://schemas.microsoft.com/sharepoint/v3"/>
+    <ds:schemaRef ds:uri="71af3243-3dd4-4a8d-8c0d-dd76da1f02a5"/>
+    <ds:schemaRef ds:uri="230e9df3-be65-4c73-a93b-d1236ebd677e"/>
+  </ds:schemaRefs>
+</ds:datastoreItem>
+</file>
+
 <file path=docMetadata/LabelInfo.xml><?xml version="1.0" encoding="utf-8"?>
 <clbl:labelList xmlns:clbl="http://schemas.microsoft.com/office/2020/mipLabelMetadata"/>
 </file>